--- a/docs/content/quarto/quarto_lecture.pptx
+++ b/docs/content/quarto/quarto_lecture.pptx
@@ -3373,7 +3373,7 @@
             </a:pPr>
             <a:r>
               <a:rPr/>
-              <a:t>2026-09-04</a:t>
+              <a:t>2026-09-08</a:t>
             </a:r>
           </a:p>
         </p:txBody>

--- a/docs/content/quarto/quarto_lecture.pptx
+++ b/docs/content/quarto/quarto_lecture.pptx
@@ -5278,7 +5278,7 @@
                 </a:solidFill>
                 <a:latin typeface="Courier"/>
               </a:rPr>
-              <a:t>tree_df &lt;- </a:t>
+              <a:t>leaf_df &lt;- </a:t>
             </a:r>
             <a:r>
               <a:rPr>
@@ -5305,7 +5305,7 @@
                 </a:solidFill>
                 <a:latin typeface="Courier"/>
               </a:rPr>
-              <a:t>"data/paper_area_weights.xlsx"</a:t>
+              <a:t>"data/2026_09_03_data_sci_leaf_area.xlsx"</a:t>
             </a:r>
             <a:r>
               <a:rPr>
@@ -5769,7 +5769,7 @@
                 </a:solidFill>
                 <a:latin typeface="Courier"/>
               </a:rPr>
-              <a:t>tree_box_plot</a:t>
+              <a:t>leaf_box_plot</a:t>
             </a:r>
             <a:br/>
             <a:r>
@@ -6068,7 +6068,7 @@
             </a:pPr>
             <a:r>
               <a:rPr/>
-              <a:t>🧩 Chunk 3 of 4 · Chunk Options &amp; Inline Code</a:t>
+              <a:t>🧩 Chunk 3 of 4 · Chunk Options &amp; Computed Values</a:t>
             </a:r>
           </a:p>
         </p:txBody>
@@ -6107,17 +6107,7 @@
             </a:r>
             <a:r>
               <a:rPr/>
-              <a:t> options to control what shows, and inline </a:t>
-            </a:r>
-            <a:r>
-              <a:rPr>
-                <a:latin typeface="Courier"/>
-              </a:rPr>
-              <a:t>`r `</a:t>
-            </a:r>
-            <a:r>
-              <a:rPr/>
-              <a:t> to drop live numbers into sentences.</a:t>
+              <a:t> options to control what shows, and printing a computed table so the report always matches the data.</a:t>
             </a:r>
           </a:p>
           <a:p>
@@ -6139,7 +6129,7 @@
             </a:r>
             <a:r>
               <a:rPr sz="2000"/>
-              <a:t> (compute a value and drop it into a sentence).</a:t>
+              <a:t> (compute a summary and print it into the report).</a:t>
             </a:r>
           </a:p>
         </p:txBody>
@@ -6278,7 +6268,7 @@
                 </a:solidFill>
                 <a:latin typeface="Courier"/>
               </a:rPr>
-              <a:t>#tree_box_plot</a:t>
+              <a:t># leaf_box_plot</a:t>
             </a:r>
             <a:br/>
             <a:r>
@@ -6632,7 +6622,7 @@
             </a:pPr>
             <a:r>
               <a:rPr/>
-              <a:t>Inline code — numbers inside sentences</a:t>
+              <a:t>Computed values — let the chunk print them</a:t>
             </a:r>
           </a:p>
         </p:txBody>
@@ -6670,17 +6660,7 @@
             </a:r>
             <a:r>
               <a:rPr sz="2000"/>
-              <a:t> If </a:t>
-            </a:r>
-            <a:r>
-              <a:rPr sz="2000">
-                <a:latin typeface="Courier"/>
-              </a:rPr>
-              <a:t>mean(shady_wt)</a:t>
-            </a:r>
-            <a:r>
-              <a:rPr sz="2000"/>
-              <a:t> is 7.8, what exact sentence will render from the inline-code line below? Say it out loud before you check.</a:t>
+              <a:t> The chunk below builds a one-row-per-group summary. How many rows and columns will the printed table have?</a:t>
             </a:r>
           </a:p>
         </p:txBody>
@@ -6727,25 +6707,15 @@
             </a:pPr>
             <a:r>
               <a:rPr/>
-              <a:t>Drop a live result </a:t>
+              <a:t>Compute the numbers in a chunk and </a:t>
             </a:r>
             <a:r>
               <a:rPr b="1"/>
-              <a:t>into a sentence</a:t>
-            </a:r>
-            <a:r>
-              <a:rPr/>
-              <a:t> with </a:t>
-            </a:r>
-            <a:r>
-              <a:rPr>
-                <a:latin typeface="Courier"/>
-              </a:rPr>
-              <a:t>`r `</a:t>
-            </a:r>
-            <a:r>
-              <a:rPr/>
-              <a:t>:</a:t>
+              <a:t>print the result</a:t>
+            </a:r>
+            <a:r>
+              <a:rPr/>
+              <a:t> — then refer to it in your prose:</a:t>
             </a:r>
           </a:p>
           <a:p>
@@ -6755,11 +6725,233 @@
             <a:r>
               <a:rPr>
                 <a:solidFill>
+                  <a:srgbClr val="5E5E5E"/>
+                </a:solidFill>
+                <a:latin typeface="Courier"/>
+              </a:rPr>
+              <a:t>```{r means}</a:t>
+            </a:r>
+            <a:br/>
+            <a:r>
+              <a:rPr>
+                <a:solidFill>
+                  <a:srgbClr val="5E5E5E"/>
+                </a:solidFill>
+                <a:latin typeface="Courier"/>
+              </a:rPr>
+              <a:t>#| echo: false</a:t>
+            </a:r>
+            <a:br/>
+            <a:r>
+              <a:rPr>
+                <a:solidFill>
+                  <a:srgbClr val="003B4F"/>
+                </a:solidFill>
+                <a:latin typeface="Courier"/>
+              </a:rPr>
+              <a:t>summary_df &lt;- leaf_df </a:t>
+            </a:r>
+            <a:r>
+              <a:rPr>
+                <a:solidFill>
+                  <a:srgbClr val="5E5E5E"/>
+                </a:solidFill>
+                <a:latin typeface="Courier"/>
+              </a:rPr>
+              <a:t>|&gt;</a:t>
+            </a:r>
+            <a:br/>
+            <a:r>
+              <a:rPr>
+                <a:solidFill>
+                  <a:srgbClr val="003B4F"/>
+                </a:solidFill>
+                <a:latin typeface="Courier"/>
+              </a:rPr>
+              <a:t>  </a:t>
+            </a:r>
+            <a:r>
+              <a:rPr>
+                <a:solidFill>
                   <a:srgbClr val="4758AB"/>
                 </a:solidFill>
                 <a:latin typeface="Courier"/>
               </a:rPr>
-              <a:t># Shady leaves averaged `# r mean(shady_wt)` g.</a:t>
+              <a:t>group_by</a:t>
+            </a:r>
+            <a:r>
+              <a:rPr>
+                <a:solidFill>
+                  <a:srgbClr val="003B4F"/>
+                </a:solidFill>
+                <a:latin typeface="Courier"/>
+              </a:rPr>
+              <a:t>(shade) </a:t>
+            </a:r>
+            <a:r>
+              <a:rPr>
+                <a:solidFill>
+                  <a:srgbClr val="5E5E5E"/>
+                </a:solidFill>
+                <a:latin typeface="Courier"/>
+              </a:rPr>
+              <a:t>|&gt;</a:t>
+            </a:r>
+            <a:br/>
+            <a:r>
+              <a:rPr>
+                <a:solidFill>
+                  <a:srgbClr val="003B4F"/>
+                </a:solidFill>
+                <a:latin typeface="Courier"/>
+              </a:rPr>
+              <a:t>  </a:t>
+            </a:r>
+            <a:r>
+              <a:rPr>
+                <a:solidFill>
+                  <a:srgbClr val="4758AB"/>
+                </a:solidFill>
+                <a:latin typeface="Courier"/>
+              </a:rPr>
+              <a:t>summarize</a:t>
+            </a:r>
+            <a:r>
+              <a:rPr>
+                <a:solidFill>
+                  <a:srgbClr val="003B4F"/>
+                </a:solidFill>
+                <a:latin typeface="Courier"/>
+              </a:rPr>
+              <a:t>(</a:t>
+            </a:r>
+            <a:r>
+              <a:rPr>
+                <a:solidFill>
+                  <a:srgbClr val="657422"/>
+                </a:solidFill>
+                <a:latin typeface="Courier"/>
+              </a:rPr>
+              <a:t>mean_mass =</a:t>
+            </a:r>
+            <a:r>
+              <a:rPr>
+                <a:solidFill>
+                  <a:srgbClr val="003B4F"/>
+                </a:solidFill>
+                <a:latin typeface="Courier"/>
+              </a:rPr>
+              <a:t> </a:t>
+            </a:r>
+            <a:r>
+              <a:rPr>
+                <a:solidFill>
+                  <a:srgbClr val="4758AB"/>
+                </a:solidFill>
+                <a:latin typeface="Courier"/>
+              </a:rPr>
+              <a:t>round</a:t>
+            </a:r>
+            <a:r>
+              <a:rPr>
+                <a:solidFill>
+                  <a:srgbClr val="003B4F"/>
+                </a:solidFill>
+                <a:latin typeface="Courier"/>
+              </a:rPr>
+              <a:t>(</a:t>
+            </a:r>
+            <a:r>
+              <a:rPr>
+                <a:solidFill>
+                  <a:srgbClr val="4758AB"/>
+                </a:solidFill>
+                <a:latin typeface="Courier"/>
+              </a:rPr>
+              <a:t>mean</a:t>
+            </a:r>
+            <a:r>
+              <a:rPr>
+                <a:solidFill>
+                  <a:srgbClr val="003B4F"/>
+                </a:solidFill>
+                <a:latin typeface="Courier"/>
+              </a:rPr>
+              <a:t>(mass_g, </a:t>
+            </a:r>
+            <a:r>
+              <a:rPr>
+                <a:solidFill>
+                  <a:srgbClr val="657422"/>
+                </a:solidFill>
+                <a:latin typeface="Courier"/>
+              </a:rPr>
+              <a:t>na.rm =</a:t>
+            </a:r>
+            <a:r>
+              <a:rPr>
+                <a:solidFill>
+                  <a:srgbClr val="003B4F"/>
+                </a:solidFill>
+                <a:latin typeface="Courier"/>
+              </a:rPr>
+              <a:t> </a:t>
+            </a:r>
+            <a:r>
+              <a:rPr>
+                <a:solidFill>
+                  <a:srgbClr val="8F5902"/>
+                </a:solidFill>
+                <a:latin typeface="Courier"/>
+              </a:rPr>
+              <a:t>TRUE</a:t>
+            </a:r>
+            <a:r>
+              <a:rPr>
+                <a:solidFill>
+                  <a:srgbClr val="003B4F"/>
+                </a:solidFill>
+                <a:latin typeface="Courier"/>
+              </a:rPr>
+              <a:t>), </a:t>
+            </a:r>
+            <a:r>
+              <a:rPr>
+                <a:solidFill>
+                  <a:srgbClr val="AD0000"/>
+                </a:solidFill>
+                <a:latin typeface="Courier"/>
+              </a:rPr>
+              <a:t>3</a:t>
+            </a:r>
+            <a:r>
+              <a:rPr>
+                <a:solidFill>
+                  <a:srgbClr val="003B4F"/>
+                </a:solidFill>
+                <a:latin typeface="Courier"/>
+              </a:rPr>
+              <a:t>))</a:t>
+            </a:r>
+            <a:br/>
+            <a:r>
+              <a:rPr>
+                <a:solidFill>
+                  <a:srgbClr val="003B4F"/>
+                </a:solidFill>
+                <a:latin typeface="Courier"/>
+              </a:rPr>
+              <a:t>summary_df</a:t>
+            </a:r>
+            <a:br/>
+            <a:r>
+              <a:rPr>
+                <a:solidFill>
+                  <a:srgbClr val="5E5E5E"/>
+                </a:solidFill>
+                <a:latin typeface="Courier"/>
+              </a:rPr>
+              <a:t>```</a:t>
             </a:r>
           </a:p>
           <a:p>
@@ -6768,7 +6960,7 @@
             </a:pPr>
             <a:r>
               <a:rPr/>
-              <a:t>renders as:</a:t>
+              <a:t>Then, in the text:</a:t>
             </a:r>
           </a:p>
           <a:p>
@@ -6777,22 +6969,24 @@
             </a:pPr>
             <a:r>
               <a:rPr sz="2000"/>
-              <a:t>Shady leaves averaged </a:t>
-            </a:r>
-            <a:r>
-              <a:rPr sz="2000" b="1"/>
-              <a:t>7.8</a:t>
+              <a:t>Read the mean mass for each side from the </a:t>
+            </a:r>
+            <a:r>
+              <a:rPr sz="2000">
+                <a:latin typeface="Courier"/>
+              </a:rPr>
+              <a:t>mean_mass</a:t>
             </a:r>
             <a:r>
               <a:rPr sz="2000"/>
-              <a:t> g.</a:t>
+              <a:t> column of the table above.</a:t>
             </a:r>
           </a:p>
           <a:p>
             <a:pPr lvl="0"/>
             <a:r>
               <a:rPr/>
-              <a:t>The number is </a:t>
+              <a:t>The numbers are </a:t>
             </a:r>
             <a:r>
               <a:rPr b="1"/>
@@ -6807,7 +7001,14 @@
             <a:pPr lvl="0"/>
             <a:r>
               <a:rPr/>
-              <a:t>Fix the data → the sentence fixes itself</a:t>
+              <a:t>Fix the data → press Render → the table fixes itself</a:t>
+            </a:r>
+          </a:p>
+          <a:p>
+            <a:pPr lvl="0"/>
+            <a:r>
+              <a:rPr/>
+              <a:t>No copy-paste, no stale numbers in your writing</a:t>
             </a:r>
           </a:p>
           <a:p>
@@ -6834,23 +7035,33 @@
             </a:pPr>
             <a:r>
               <a:rPr sz="2000"/>
-              <a:t>This is why inline code is worth the syntax: your </a:t>
+              <a:t>Keep every number your reader sees inside a chunk’s </a:t>
+            </a:r>
+            <a:r>
+              <a:rPr sz="2000" b="1"/>
+              <a:t>printed output</a:t>
+            </a:r>
+            <a:r>
+              <a:rPr sz="2000"/>
+              <a:t> (a table or a </a:t>
+            </a:r>
+            <a:r>
+              <a:rPr sz="2000">
+                <a:latin typeface="Courier"/>
+              </a:rPr>
+              <a:t>cat()</a:t>
+            </a:r>
+            <a:r>
+              <a:rPr sz="2000"/>
+              <a:t> line). Your prose then </a:t>
             </a:r>
             <a:r>
               <a:rPr sz="2000" i="1"/>
-              <a:t>prose</a:t>
+              <a:t>points at</a:t>
             </a:r>
             <a:r>
               <a:rPr sz="2000"/>
-              <a:t> stays true to your </a:t>
-            </a:r>
-            <a:r>
-              <a:rPr sz="2000" i="1"/>
-              <a:t>data</a:t>
-            </a:r>
-            <a:r>
-              <a:rPr sz="2000"/>
-              <a:t> without you retyping a single number.</a:t>
+              <a:t> the results instead of restating them.</a:t>
             </a:r>
           </a:p>
         </p:txBody>
@@ -6893,7 +7104,7 @@
             </a:pPr>
             <a:r>
               <a:rPr sz="2000"/>
-              <a:t>Inline code only works if the object exists. Load and compute it in a chunk </a:t>
+              <a:t>The chunk that computes the value must run </a:t>
             </a:r>
             <a:r>
               <a:rPr sz="2000" b="1"/>
@@ -6901,7 +7112,7 @@
             </a:r>
             <a:r>
               <a:rPr sz="2000"/>
-              <a:t> the sentence.</a:t>
+              <a:t> the text that refers to it — Quarto renders top to bottom.</a:t>
             </a:r>
           </a:p>
         </p:txBody>
@@ -6987,7 +7198,7 @@
             </a:pPr>
             <a:r>
               <a:rPr/>
-              <a:t>Compute a group mean, then insert it into a sentence with inline code. Predict the number that will appear before you Render.</a:t>
+              <a:t>Compute a group-means summary in a chunk and print it into the report. Predict the shape of the table before you Render.</a:t>
             </a:r>
           </a:p>
         </p:txBody>
@@ -8835,16 +9046,12 @@
           <a:p>
             <a:pPr lvl="0"/>
             <a:r>
-              <a:rPr/>
-              <a:t>Put a </a:t>
-            </a:r>
-            <a:r>
               <a:rPr b="1"/>
-              <a:t>live number in a sentence</a:t>
-            </a:r>
-            <a:r>
-              <a:rPr/>
-              <a:t> with inline code</a:t>
+              <a:t>Compute values in a chunk and print them</a:t>
+            </a:r>
+            <a:r>
+              <a:rPr/>
+              <a:t> so the report always matches the data</a:t>
             </a:r>
           </a:p>
           <a:p>
@@ -10325,7 +10532,7 @@
             </a:pPr>
             <a:r>
               <a:rPr/>
-              <a:t>Diagram of the pipe operator: tree_df flows down into filter(side == “sunny”), then flows down into summary(), read as “take tree_df, then filter, then summarise.”</a:t>
+              <a:t>Diagram of the pipe operator: leaf_df flows down into filter(shade == “sunny”), then flows down into summary(), read as “take leaf_df, then filter, then summarise.”</a:t>
             </a:r>
           </a:p>
         </p:txBody>

--- a/docs/content/quarto/quarto_lecture.pptx
+++ b/docs/content/quarto/quarto_lecture.pptx
@@ -3373,7 +3373,7 @@
             </a:pPr>
             <a:r>
               <a:rPr/>
-              <a:t>2026-09-08</a:t>
+              <a:t>2026-09-10</a:t>
             </a:r>
           </a:p>
         </p:txBody>

--- a/docs/content/quarto/quarto_lecture.pptx
+++ b/docs/content/quarto/quarto_lecture.pptx
@@ -3373,7 +3373,7 @@
             </a:pPr>
             <a:r>
               <a:rPr/>
-              <a:t>2026-09-10</a:t>
+              <a:t>2026-09-14</a:t>
             </a:r>
           </a:p>
         </p:txBody>

--- a/docs/content/quarto/quarto_lecture.pptx
+++ b/docs/content/quarto/quarto_lecture.pptx
@@ -3373,7 +3373,7 @@
             </a:pPr>
             <a:r>
               <a:rPr/>
-              <a:t>2026-09-14</a:t>
+              <a:t>2026-09-21</a:t>
             </a:r>
           </a:p>
         </p:txBody>

--- a/docs/content/quarto/quarto_lecture.pptx
+++ b/docs/content/quarto/quarto_lecture.pptx
@@ -3373,7 +3373,7 @@
             </a:pPr>
             <a:r>
               <a:rPr/>
-              <a:t>2026-09-21</a:t>
+              <a:t>2026-09-22</a:t>
             </a:r>
           </a:p>
         </p:txBody>

--- a/docs/content/quarto/quarto_lecture.pptx
+++ b/docs/content/quarto/quarto_lecture.pptx
@@ -3373,7 +3373,7 @@
             </a:pPr>
             <a:r>
               <a:rPr/>
-              <a:t>2026-09-22</a:t>
+              <a:t>2026-09-23</a:t>
             </a:r>
           </a:p>
         </p:txBody>

--- a/docs/content/quarto/quarto_lecture.pptx
+++ b/docs/content/quarto/quarto_lecture.pptx
@@ -3697,7 +3697,7 @@
               <a:rPr>
                 <a:latin typeface="Courier"/>
               </a:rPr>
-              <a:t>1. YAML front matter  ← the recipe (title, outputs, chunk defaults)
+              <a:t>1. YAML front matter  ← the recipe (title, outputs, defaults)
 2. Markdown text      ← your writing, formatted
 3. Code chunks        ← R that runs and shows results</a:t>
             </a:r>
@@ -5384,7 +5384,17 @@
                 </a:solidFill>
                 <a:latin typeface="Courier"/>
               </a:rPr>
-              <a:t>leaf_df &lt;- </a:t>
+              <a:t>leaf_df &lt;-</a:t>
+            </a:r>
+            <a:br/>
+            <a:r>
+              <a:rPr>
+                <a:solidFill>
+                  <a:srgbClr val="003B4F"/>
+                </a:solidFill>
+                <a:latin typeface="Courier"/>
+              </a:rPr>
+              <a:t>  </a:t>
             </a:r>
             <a:r>
               <a:rPr>
@@ -6858,11 +6868,29 @@
             </a:pPr>
             <a:r>
               <a:rPr sz="2000" b="1"/>
-              <a:t>🖐 After this chunk: Activity Parts 5–6</a:t>
+              <a:t>🖐 Your skeleton already has a plain, working version of every chunk below.</a:t>
             </a:r>
             <a:r>
               <a:rPr sz="2000"/>
-              <a:t> (the three plots and the summary table).</a:t>
+              <a:t> You add the finishing touches — colors, labels, </a:t>
+            </a:r>
+            <a:r>
+              <a:rPr sz="2000">
+                <a:latin typeface="Courier"/>
+              </a:rPr>
+              <a:t>theme_regular()</a:t>
+            </a:r>
+            <a:r>
+              <a:rPr sz="2000"/>
+              <a:t>, table formatting — in </a:t>
+            </a:r>
+            <a:r>
+              <a:rPr sz="2000" b="1"/>
+              <a:t>Activity Parts 5–6</a:t>
+            </a:r>
+            <a:r>
+              <a:rPr sz="2000"/>
+              <a:t>.</a:t>
             </a:r>
           </a:p>
         </p:txBody>
@@ -6977,7 +7005,17 @@
                 </a:solidFill>
                 <a:latin typeface="Courier"/>
               </a:rPr>
-              <a:t>leaf_df &lt;- </a:t>
+              <a:t>leaf_df &lt;-</a:t>
+            </a:r>
+            <a:br/>
+            <a:r>
+              <a:rPr>
+                <a:solidFill>
+                  <a:srgbClr val="003B4F"/>
+                </a:solidFill>
+                <a:latin typeface="Courier"/>
+              </a:rPr>
+              <a:t>  </a:t>
             </a:r>
             <a:r>
               <a:rPr>
@@ -7370,7 +7408,7 @@
                 </a:solidFill>
                 <a:latin typeface="Courier"/>
               </a:rPr>
-              <a:t>#| fig-cap: "Leaf mass by side of the tree. Points are individual leaves."</a:t>
+              <a:t>#| fig-cap: "Leaf mass by side; each point is one leaf."</a:t>
             </a:r>
             <a:br/>
             <a:r>
@@ -7846,7 +7884,17 @@
                 </a:solidFill>
                 <a:latin typeface="Courier"/>
               </a:rPr>
-              <a:t>, </a:t>
+              <a:t>,</a:t>
+            </a:r>
+            <a:br/>
+            <a:r>
+              <a:rPr>
+                <a:solidFill>
+                  <a:srgbClr val="003B4F"/>
+                </a:solidFill>
+                <a:latin typeface="Courier"/>
+              </a:rPr>
+              <a:t>                               </a:t>
             </a:r>
             <a:r>
               <a:rPr>
@@ -8173,7 +8221,7 @@
             </a:pPr>
             <a:r>
               <a:rPr/>
-              <a:t>Figure 1: Leaf mass by side of the tree. Points are individual leaves.</a:t>
+              <a:t>Figure 1: Leaf mass by side; each point is one leaf.</a:t>
             </a:r>
           </a:p>
         </p:txBody>
@@ -8872,6 +8920,52 @@
                 </a:solidFill>
                 <a:latin typeface="Courier"/>
               </a:rPr>
+              <a:t>,</a:t>
+            </a:r>
+            <a:br/>
+            <a:r>
+              <a:rPr>
+                <a:solidFill>
+                  <a:srgbClr val="003B4F"/>
+                </a:solidFill>
+                <a:latin typeface="Courier"/>
+              </a:rPr>
+              <a:t>               </a:t>
+            </a:r>
+            <a:r>
+              <a:rPr>
+                <a:solidFill>
+                  <a:srgbClr val="657422"/>
+                </a:solidFill>
+                <a:latin typeface="Courier"/>
+              </a:rPr>
+              <a:t>width =</a:t>
+            </a:r>
+            <a:r>
+              <a:rPr>
+                <a:solidFill>
+                  <a:srgbClr val="003B4F"/>
+                </a:solidFill>
+                <a:latin typeface="Courier"/>
+              </a:rPr>
+              <a:t> </a:t>
+            </a:r>
+            <a:r>
+              <a:rPr>
+                <a:solidFill>
+                  <a:srgbClr val="AD0000"/>
+                </a:solidFill>
+                <a:latin typeface="Courier"/>
+              </a:rPr>
+              <a:t>0.15</a:t>
+            </a:r>
+            <a:r>
+              <a:rPr>
+                <a:solidFill>
+                  <a:srgbClr val="003B4F"/>
+                </a:solidFill>
+                <a:latin typeface="Courier"/>
+              </a:rPr>
               <a:t>, </a:t>
             </a:r>
             <a:r>
@@ -8881,7 +8975,7 @@
                 </a:solidFill>
                 <a:latin typeface="Courier"/>
               </a:rPr>
-              <a:t>width =</a:t>
+              <a:t>linewidth =</a:t>
             </a:r>
             <a:r>
               <a:rPr>
@@ -8899,16 +8993,53 @@
                 </a:solidFill>
                 <a:latin typeface="Courier"/>
               </a:rPr>
-              <a:t>0.15</a:t>
-            </a:r>
-            <a:r>
-              <a:rPr>
-                <a:solidFill>
-                  <a:srgbClr val="003B4F"/>
-                </a:solidFill>
-                <a:latin typeface="Courier"/>
-              </a:rPr>
-              <a:t>, </a:t>
+              <a:t>0.9</a:t>
+            </a:r>
+            <a:r>
+              <a:rPr>
+                <a:solidFill>
+                  <a:srgbClr val="003B4F"/>
+                </a:solidFill>
+                <a:latin typeface="Courier"/>
+              </a:rPr>
+              <a:t>) </a:t>
+            </a:r>
+            <a:r>
+              <a:rPr>
+                <a:solidFill>
+                  <a:srgbClr val="5E5E5E"/>
+                </a:solidFill>
+                <a:latin typeface="Courier"/>
+              </a:rPr>
+              <a:t>+</a:t>
+            </a:r>
+            <a:br/>
+            <a:r>
+              <a:rPr>
+                <a:solidFill>
+                  <a:srgbClr val="003B4F"/>
+                </a:solidFill>
+                <a:latin typeface="Courier"/>
+              </a:rPr>
+              <a:t>  </a:t>
+            </a:r>
+            <a:r>
+              <a:rPr>
+                <a:solidFill>
+                  <a:srgbClr val="4758AB"/>
+                </a:solidFill>
+                <a:latin typeface="Courier"/>
+              </a:rPr>
+              <a:t>scale_color_manual</a:t>
+            </a:r>
+            <a:r>
+              <a:rPr>
+                <a:solidFill>
+                  <a:srgbClr val="003B4F"/>
+                </a:solidFill>
+                <a:latin typeface="Courier"/>
+              </a:rPr>
+              <a:t>(</a:t>
             </a:r>
             <a:r>
               <a:rPr>
@@ -8917,7 +9048,7 @@
                 </a:solidFill>
                 <a:latin typeface="Courier"/>
               </a:rPr>
-              <a:t>linewidth =</a:t>
+              <a:t>values =</a:t>
             </a:r>
             <a:r>
               <a:rPr>
@@ -8931,29 +9062,56 @@
             <a:r>
               <a:rPr>
                 <a:solidFill>
-                  <a:srgbClr val="AD0000"/>
-                </a:solidFill>
-                <a:latin typeface="Courier"/>
-              </a:rPr>
-              <a:t>0.9</a:t>
-            </a:r>
-            <a:r>
-              <a:rPr>
-                <a:solidFill>
-                  <a:srgbClr val="003B4F"/>
-                </a:solidFill>
-                <a:latin typeface="Courier"/>
-              </a:rPr>
-              <a:t>) </a:t>
-            </a:r>
-            <a:r>
-              <a:rPr>
-                <a:solidFill>
-                  <a:srgbClr val="5E5E5E"/>
-                </a:solidFill>
-                <a:latin typeface="Courier"/>
-              </a:rPr>
-              <a:t>+</a:t>
+                  <a:srgbClr val="4758AB"/>
+                </a:solidFill>
+                <a:latin typeface="Courier"/>
+              </a:rPr>
+              <a:t>c</a:t>
+            </a:r>
+            <a:r>
+              <a:rPr>
+                <a:solidFill>
+                  <a:srgbClr val="003B4F"/>
+                </a:solidFill>
+                <a:latin typeface="Courier"/>
+              </a:rPr>
+              <a:t>(</a:t>
+            </a:r>
+            <a:r>
+              <a:rPr>
+                <a:solidFill>
+                  <a:srgbClr val="20794D"/>
+                </a:solidFill>
+                <a:latin typeface="Courier"/>
+              </a:rPr>
+              <a:t>"sunny"</a:t>
+            </a:r>
+            <a:r>
+              <a:rPr>
+                <a:solidFill>
+                  <a:srgbClr val="003B4F"/>
+                </a:solidFill>
+                <a:latin typeface="Courier"/>
+              </a:rPr>
+              <a:t> = </a:t>
+            </a:r>
+            <a:r>
+              <a:rPr>
+                <a:solidFill>
+                  <a:srgbClr val="20794D"/>
+                </a:solidFill>
+                <a:latin typeface="Courier"/>
+              </a:rPr>
+              <a:t>"goldenrod"</a:t>
+            </a:r>
+            <a:r>
+              <a:rPr>
+                <a:solidFill>
+                  <a:srgbClr val="003B4F"/>
+                </a:solidFill>
+                <a:latin typeface="Courier"/>
+              </a:rPr>
+              <a:t>,</a:t>
             </a:r>
             <a:br/>
             <a:r>
@@ -8963,97 +9121,7 @@
                 </a:solidFill>
                 <a:latin typeface="Courier"/>
               </a:rPr>
-              <a:t>  </a:t>
-            </a:r>
-            <a:r>
-              <a:rPr>
-                <a:solidFill>
-                  <a:srgbClr val="4758AB"/>
-                </a:solidFill>
-                <a:latin typeface="Courier"/>
-              </a:rPr>
-              <a:t>scale_color_manual</a:t>
-            </a:r>
-            <a:r>
-              <a:rPr>
-                <a:solidFill>
-                  <a:srgbClr val="003B4F"/>
-                </a:solidFill>
-                <a:latin typeface="Courier"/>
-              </a:rPr>
-              <a:t>(</a:t>
-            </a:r>
-            <a:r>
-              <a:rPr>
-                <a:solidFill>
-                  <a:srgbClr val="657422"/>
-                </a:solidFill>
-                <a:latin typeface="Courier"/>
-              </a:rPr>
-              <a:t>values =</a:t>
-            </a:r>
-            <a:r>
-              <a:rPr>
-                <a:solidFill>
-                  <a:srgbClr val="003B4F"/>
-                </a:solidFill>
-                <a:latin typeface="Courier"/>
-              </a:rPr>
-              <a:t> </a:t>
-            </a:r>
-            <a:r>
-              <a:rPr>
-                <a:solidFill>
-                  <a:srgbClr val="4758AB"/>
-                </a:solidFill>
-                <a:latin typeface="Courier"/>
-              </a:rPr>
-              <a:t>c</a:t>
-            </a:r>
-            <a:r>
-              <a:rPr>
-                <a:solidFill>
-                  <a:srgbClr val="003B4F"/>
-                </a:solidFill>
-                <a:latin typeface="Courier"/>
-              </a:rPr>
-              <a:t>(</a:t>
-            </a:r>
-            <a:r>
-              <a:rPr>
-                <a:solidFill>
-                  <a:srgbClr val="20794D"/>
-                </a:solidFill>
-                <a:latin typeface="Courier"/>
-              </a:rPr>
-              <a:t>"sunny"</a:t>
-            </a:r>
-            <a:r>
-              <a:rPr>
-                <a:solidFill>
-                  <a:srgbClr val="003B4F"/>
-                </a:solidFill>
-                <a:latin typeface="Courier"/>
-              </a:rPr>
-              <a:t> = </a:t>
-            </a:r>
-            <a:r>
-              <a:rPr>
-                <a:solidFill>
-                  <a:srgbClr val="20794D"/>
-                </a:solidFill>
-                <a:latin typeface="Courier"/>
-              </a:rPr>
-              <a:t>"goldenrod"</a:t>
-            </a:r>
-            <a:r>
-              <a:rPr>
-                <a:solidFill>
-                  <a:srgbClr val="003B4F"/>
-                </a:solidFill>
-                <a:latin typeface="Courier"/>
-              </a:rPr>
-              <a:t>, </a:t>
+              <a:t>                                </a:t>
             </a:r>
             <a:r>
               <a:rPr>
@@ -9924,7 +9992,17 @@
                 </a:solidFill>
                 <a:latin typeface="Courier"/>
               </a:rPr>
-              <a:t>, </a:t>
+              <a:t>,</a:t>
+            </a:r>
+            <a:br/>
+            <a:r>
+              <a:rPr>
+                <a:solidFill>
+                  <a:srgbClr val="003B4F"/>
+                </a:solidFill>
+                <a:latin typeface="Courier"/>
+              </a:rPr>
+              <a:t>                               </a:t>
             </a:r>
             <a:r>
               <a:rPr>
@@ -10397,7 +10475,7 @@
                 </a:solidFill>
                 <a:latin typeface="Courier"/>
               </a:rPr>
-              <a:t>#| tbl-cap: "Summary statistics for leaf mass (g) on each side of the tree."</a:t>
+              <a:t>#| tbl-cap: "Summary statistics for leaf mass (g) by side."</a:t>
             </a:r>
             <a:br/>
             <a:r>
@@ -10560,6 +10638,16 @@
               </a:rPr>
               <a:t>(</a:t>
             </a:r>
+            <a:br/>
+            <a:r>
+              <a:rPr>
+                <a:solidFill>
+                  <a:srgbClr val="003B4F"/>
+                </a:solidFill>
+                <a:latin typeface="Courier"/>
+              </a:rPr>
+              <a:t>    </a:t>
+            </a:r>
             <a:r>
               <a:rPr>
                 <a:solidFill>
@@ -10604,7 +10692,7 @@
                 </a:solidFill>
                 <a:latin typeface="Courier"/>
               </a:rPr>
-              <a:t>               </a:t>
+              <a:t>    </a:t>
             </a:r>
             <a:r>
               <a:rPr>
@@ -10712,6 +10800,34 @@
                 </a:solidFill>
                 <a:latin typeface="Courier"/>
               </a:rPr>
+              <a:t>,</a:t>
+            </a:r>
+            <a:br/>
+            <a:r>
+              <a:rPr>
+                <a:solidFill>
+                  <a:srgbClr val="003B4F"/>
+                </a:solidFill>
+                <a:latin typeface="Courier"/>
+              </a:rPr>
+              <a:t>                  </a:t>
+            </a:r>
+            <a:r>
+              <a:rPr>
+                <a:solidFill>
+                  <a:srgbClr val="20794D"/>
+                </a:solidFill>
+                <a:latin typeface="Courier"/>
+              </a:rPr>
+              <a:t>"SD"</a:t>
+            </a:r>
+            <a:r>
+              <a:rPr>
+                <a:solidFill>
+                  <a:srgbClr val="003B4F"/>
+                </a:solidFill>
+                <a:latin typeface="Courier"/>
+              </a:rPr>
               <a:t>, </a:t>
             </a:r>
             <a:r>
@@ -10721,7 +10837,7 @@
                 </a:solidFill>
                 <a:latin typeface="Courier"/>
               </a:rPr>
-              <a:t>"SD"</a:t>
+              <a:t>"SE"</a:t>
             </a:r>
             <a:r>
               <a:rPr>
@@ -10731,34 +10847,6 @@
                 <a:latin typeface="Courier"/>
               </a:rPr>
               <a:t>, </a:t>
-            </a:r>
-            <a:r>
-              <a:rPr>
-                <a:solidFill>
-                  <a:srgbClr val="20794D"/>
-                </a:solidFill>
-                <a:latin typeface="Courier"/>
-              </a:rPr>
-              <a:t>"SE"</a:t>
-            </a:r>
-            <a:r>
-              <a:rPr>
-                <a:solidFill>
-                  <a:srgbClr val="003B4F"/>
-                </a:solidFill>
-                <a:latin typeface="Courier"/>
-              </a:rPr>
-              <a:t>,</a:t>
-            </a:r>
-            <a:br/>
-            <a:r>
-              <a:rPr>
-                <a:solidFill>
-                  <a:srgbClr val="003B4F"/>
-                </a:solidFill>
-                <a:latin typeface="Courier"/>
-              </a:rPr>
-              <a:t>                             </a:t>
             </a:r>
             <a:r>
               <a:rPr>
@@ -11642,7 +11730,47 @@
             </a:pPr>
             <a:r>
               <a:rPr/>
-              <a:t>Fill in the three plot chunks and the summary-table chunk. Render after </a:t>
+              <a:t>Render the plain plots and table first, then finish them: colors, axis labels, </a:t>
+            </a:r>
+            <a:r>
+              <a:rPr>
+                <a:latin typeface="Courier"/>
+              </a:rPr>
+              <a:t>theme_regular()</a:t>
+            </a:r>
+            <a:r>
+              <a:rPr/>
+              <a:t>, no legend, and </a:t>
+            </a:r>
+            <a:r>
+              <a:rPr>
+                <a:latin typeface="Courier"/>
+              </a:rPr>
+              <a:t>digits</a:t>
+            </a:r>
+            <a:r>
+              <a:rPr/>
+              <a:t> + </a:t>
+            </a:r>
+            <a:r>
+              <a:rPr>
+                <a:latin typeface="Courier"/>
+              </a:rPr>
+              <a:t>col.names</a:t>
+            </a:r>
+            <a:r>
+              <a:rPr/>
+              <a:t> in </a:t>
+            </a:r>
+            <a:r>
+              <a:rPr>
+                <a:latin typeface="Courier"/>
+              </a:rPr>
+              <a:t>kable()</a:t>
+            </a:r>
+            <a:r>
+              <a:rPr/>
+              <a:t>. Render after </a:t>
             </a:r>
             <a:r>
               <a:rPr b="1"/>
@@ -11650,7 +11778,7 @@
             </a:r>
             <a:r>
               <a:rPr/>
-              <a:t> one — check that every figure and table gets a number.</a:t>
+              <a:t> one.</a:t>
             </a:r>
           </a:p>
         </p:txBody>
@@ -11749,11 +11877,11 @@
             </a:pPr>
             <a:r>
               <a:rPr sz="2000" b="1"/>
-              <a:t>🖐 After this chunk: Activity Parts 7–8</a:t>
+              <a:t>🖐 After this chunk: Activity Parts 7–9</a:t>
             </a:r>
             <a:r>
               <a:rPr sz="2000"/>
-              <a:t> (t-test, then render all three and hand in).</a:t>
+              <a:t> (t-test, render all three and hand in, then play).</a:t>
             </a:r>
           </a:p>
         </p:txBody>
@@ -12227,7 +12355,7 @@
                 </a:solidFill>
                 <a:latin typeface="Courier"/>
               </a:rPr>
-              <a:t># Welch's two-sample t-test (does NOT assume equal variances) ----</a:t>
+              <a:t># Welch's t-test (does NOT assume equal variances) ----</a:t>
             </a:r>
             <a:br/>
             <a:r>
@@ -12291,7 +12419,17 @@
                 </a:solidFill>
                 <a:latin typeface="Courier"/>
               </a:rPr>
-              <a:t> leaf_df, </a:t>
+              <a:t> leaf_df,</a:t>
+            </a:r>
+            <a:br/>
+            <a:r>
+              <a:rPr>
+                <a:solidFill>
+                  <a:srgbClr val="003B4F"/>
+                </a:solidFill>
+                <a:latin typeface="Courier"/>
+              </a:rPr>
+              <a:t>                     </a:t>
             </a:r>
             <a:r>
               <a:rPr>
@@ -12593,7 +12731,7 @@
                 </a:solidFill>
                 <a:latin typeface="Courier"/>
               </a:rPr>
-              <a:t>#| tbl-cap: "Welch's two-sample t-test of leaf mass by side of the tree."</a:t>
+              <a:t>#| tbl-cap: "Welch's t-test of leaf mass by side of the tree."</a:t>
             </a:r>
             <a:br/>
             <a:r>
@@ -12697,7 +12835,17 @@
                 </a:solidFill>
                 <a:latin typeface="Courier"/>
               </a:rPr>
-              <a:t>(estimate1, estimate2, statistic, parameter, p.value, conf.low) </a:t>
+              <a:t>(estimate1, estimate2, statistic, parameter,</a:t>
+            </a:r>
+            <a:br/>
+            <a:r>
+              <a:rPr>
+                <a:solidFill>
+                  <a:srgbClr val="003B4F"/>
+                </a:solidFill>
+                <a:latin typeface="Courier"/>
+              </a:rPr>
+              <a:t>         p.value, conf.low) </a:t>
             </a:r>
             <a:r>
               <a:rPr>
@@ -12745,6 +12893,16 @@
               </a:rPr>
               <a:t>(</a:t>
             </a:r>
+            <a:br/>
+            <a:r>
+              <a:rPr>
+                <a:solidFill>
+                  <a:srgbClr val="003B4F"/>
+                </a:solidFill>
+                <a:latin typeface="Courier"/>
+              </a:rPr>
+              <a:t>    </a:t>
+            </a:r>
             <a:r>
               <a:rPr>
                 <a:solidFill>
@@ -12789,7 +12947,7 @@
                 </a:solidFill>
                 <a:latin typeface="Courier"/>
               </a:rPr>
-              <a:t>               </a:t>
+              <a:t>    </a:t>
             </a:r>
             <a:r>
               <a:rPr>
@@ -12879,35 +13037,35 @@
                 </a:solidFill>
                 <a:latin typeface="Courier"/>
               </a:rPr>
+              <a:t>,</a:t>
+            </a:r>
+            <a:br/>
+            <a:r>
+              <a:rPr>
+                <a:solidFill>
+                  <a:srgbClr val="003B4F"/>
+                </a:solidFill>
+                <a:latin typeface="Courier"/>
+              </a:rPr>
+              <a:t>                  </a:t>
+            </a:r>
+            <a:r>
+              <a:rPr>
+                <a:solidFill>
+                  <a:srgbClr val="20794D"/>
+                </a:solidFill>
+                <a:latin typeface="Courier"/>
+              </a:rPr>
+              <a:t>"df"</a:t>
+            </a:r>
+            <a:r>
+              <a:rPr>
+                <a:solidFill>
+                  <a:srgbClr val="003B4F"/>
+                </a:solidFill>
+                <a:latin typeface="Courier"/>
+              </a:rPr>
               <a:t>, </a:t>
-            </a:r>
-            <a:r>
-              <a:rPr>
-                <a:solidFill>
-                  <a:srgbClr val="20794D"/>
-                </a:solidFill>
-                <a:latin typeface="Courier"/>
-              </a:rPr>
-              <a:t>"df"</a:t>
-            </a:r>
-            <a:r>
-              <a:rPr>
-                <a:solidFill>
-                  <a:srgbClr val="003B4F"/>
-                </a:solidFill>
-                <a:latin typeface="Courier"/>
-              </a:rPr>
-              <a:t>,</a:t>
-            </a:r>
-            <a:br/>
-            <a:r>
-              <a:rPr>
-                <a:solidFill>
-                  <a:srgbClr val="003B4F"/>
-                </a:solidFill>
-                <a:latin typeface="Courier"/>
-              </a:rPr>
-              <a:t>                             </a:t>
             </a:r>
             <a:r>
               <a:rPr>
@@ -13627,7 +13785,17 @@
                 </a:solidFill>
                 <a:latin typeface="Courier"/>
               </a:rPr>
-              <a:t> leaf_df, </a:t>
+              <a:t> leaf_df,</a:t>
+            </a:r>
+            <a:br/>
+            <a:r>
+              <a:rPr>
+                <a:solidFill>
+                  <a:srgbClr val="003B4F"/>
+                </a:solidFill>
+                <a:latin typeface="Courier"/>
+              </a:rPr>
+              <a:t>                     </a:t>
             </a:r>
             <a:r>
               <a:rPr>
@@ -14244,7 +14412,7 @@
             </a:pPr>
             <a:r>
               <a:rPr/>
-              <a:t>Run the Welch’s t-test, add the results table and a short Discussion, set </a:t>
+              <a:t>Read the Welch’s t-test, finish its table, write a short Discussion, set </a:t>
             </a:r>
             <a:r>
               <a:rPr>
@@ -14294,7 +14462,15 @@
             </a:r>
             <a:r>
               <a:rPr/>
-              <a:t>.</a:t>
+              <a:t> — then </a:t>
+            </a:r>
+            <a:r>
+              <a:rPr b="1"/>
+              <a:t>play</a:t>
+            </a:r>
+            <a:r>
+              <a:rPr/>
+              <a:t> (Activity Part 9).</a:t>
             </a:r>
           </a:p>
         </p:txBody>
@@ -14537,6 +14713,39 @@
             <a:r>
               <a:rPr sz="2000"/>
               <a:t>From here on, every analysis can be a document that rebuilds itself from the raw data.</a:t>
+            </a:r>
+          </a:p>
+          <a:p>
+            <a:pPr lvl="0" indent="0" marL="1270000">
+              <a:buNone/>
+            </a:pPr>
+            <a:r>
+              <a:rPr sz="2000" b="1"/>
+              <a:t>Tip</a:t>
+            </a:r>
+          </a:p>
+          <a:p>
+            <a:pPr lvl="0" indent="0" marL="1270000">
+              <a:buNone/>
+            </a:pPr>
+            <a:r>
+              <a:rPr sz="2000" b="1"/>
+              <a:t>🧰 Keep </a:t>
+            </a:r>
+            <a:r>
+              <a:rPr sz="2000" b="1">
+                <a:latin typeface="Courier"/>
+              </a:rPr>
+              <a:t>leaf_report.qmd</a:t>
+            </a:r>
+          </a:p>
+          <a:p>
+            <a:pPr lvl="0" indent="0" marL="1270000">
+              <a:buNone/>
+            </a:pPr>
+            <a:r>
+              <a:rPr sz="2000"/>
+              <a:t>It is your template for every analysis this term: copy it, change the data file and column names, rewrite the text, Render.</a:t>
             </a:r>
           </a:p>
           <a:p>

--- a/docs/content/quarto/quarto_lecture.pptx
+++ b/docs/content/quarto/quarto_lecture.pptx
@@ -40,6 +40,10 @@
     <p:sldId id="288" r:id="rId34"/>
     <p:sldId id="289" r:id="rId35"/>
     <p:sldId id="290" r:id="rId36"/>
+    <p:sldId id="291" r:id="rId37"/>
+    <p:sldId id="292" r:id="rId38"/>
+    <p:sldId id="293" r:id="rId39"/>
+    <p:sldId id="294" r:id="rId40"/>
   </p:sldIdLst>
   <p:sldSz cx="9144000" cy="5143500" type="screen16x9"/>
   <p:notesSz cx="6858000" cy="9144000"/>
@@ -7276,7 +7280,7 @@
         <p:spPr>
           <a:xfrm>
             <a:off x="0" y="0"/>
-            <a:ext cx="9144000" cy="582780"/>
+            <a:ext cx="9144000" cy="871538"/>
           </a:xfrm>
         </p:spPr>
         <p:txBody>
@@ -7295,12 +7299,12 @@
       </p:sp>
       <p:sp>
         <p:nvSpPr>
-          <p:cNvPr id="3" name="Content Placeholder 2"/>
+          <p:cNvPr id="4" name="Text Placeholder 3"/>
           <p:cNvSpPr>
             <a:spLocks noGrp="1"/>
           </p:cNvSpPr>
           <p:nvPr>
-            <p:ph idx="1"/>
+            <p:ph idx="2" sz="half" type="body"/>
           </p:nvPr>
         </p:nvSpPr>
         <p:spPr/>
@@ -7308,35 +7312,486 @@
           <a:bodyPr/>
           <a:lstStyle/>
           <a:p>
-            <a:pPr lvl="0" indent="0" marL="1270000">
-              <a:buNone/>
-            </a:pPr>
-            <a:r>
-              <a:rPr sz="2000" b="1"/>
-              <a:t>Note</a:t>
-            </a:r>
-          </a:p>
-          <a:p>
-            <a:pPr lvl="0" indent="0" marL="1270000">
-              <a:buNone/>
-            </a:pPr>
-            <a:r>
-              <a:rPr sz="2000" b="1"/>
-              <a:t>🔮 Predict first:</a:t>
-            </a:r>
-            <a:r>
-              <a:rPr sz="2000"/>
-              <a:t> The label starts with </a:t>
-            </a:r>
-            <a:r>
-              <a:rPr sz="2000">
-                <a:latin typeface="Courier"/>
-              </a:rPr>
-              <a:t>fig-</a:t>
-            </a:r>
-            <a:r>
-              <a:rPr sz="2000"/>
-              <a:t>. What will the caption under the plot start with?</a:t>
+            <a:pPr lvl="0" indent="0">
+              <a:buNone/>
+            </a:pPr>
+            <a:r>
+              <a:rPr>
+                <a:solidFill>
+                  <a:srgbClr val="5E5E5E"/>
+                </a:solidFill>
+                <a:latin typeface="Courier"/>
+              </a:rPr>
+              <a:t>```{r}</a:t>
+            </a:r>
+            <a:br/>
+            <a:r>
+              <a:rPr>
+                <a:solidFill>
+                  <a:srgbClr val="5E5E5E"/>
+                </a:solidFill>
+                <a:latin typeface="Courier"/>
+              </a:rPr>
+              <a:t>#| label: fig-boxplot</a:t>
+            </a:r>
+            <a:br/>
+            <a:r>
+              <a:rPr>
+                <a:solidFill>
+                  <a:srgbClr val="5E5E5E"/>
+                </a:solidFill>
+                <a:latin typeface="Courier"/>
+              </a:rPr>
+              <a:t>#| output-location: column</a:t>
+            </a:r>
+            <a:br/>
+            <a:r>
+              <a:rPr>
+                <a:solidFill>
+                  <a:srgbClr val="5E5E5E"/>
+                </a:solidFill>
+                <a:latin typeface="Courier"/>
+              </a:rPr>
+              <a:t>#| fig-cap: "Leaf mass by side; each point is one leaf."</a:t>
+            </a:r>
+            <a:br/>
+            <a:r>
+              <a:rPr>
+                <a:solidFill>
+                  <a:srgbClr val="5E5E5E"/>
+                </a:solidFill>
+                <a:latin typeface="Courier"/>
+              </a:rPr>
+              <a:t>#| fig-width: 5</a:t>
+            </a:r>
+            <a:br/>
+            <a:r>
+              <a:rPr>
+                <a:solidFill>
+                  <a:srgbClr val="5E5E5E"/>
+                </a:solidFill>
+                <a:latin typeface="Courier"/>
+              </a:rPr>
+              <a:t>#| fig-height: 4</a:t>
+            </a:r>
+            <a:br/>
+            <a:r>
+              <a:rPr>
+                <a:solidFill>
+                  <a:srgbClr val="5E5E5E"/>
+                </a:solidFill>
+                <a:latin typeface="Courier"/>
+              </a:rPr>
+              <a:t># box plot with raw points on top ----</a:t>
+            </a:r>
+            <a:br/>
+            <a:r>
+              <a:rPr>
+                <a:solidFill>
+                  <a:srgbClr val="003B4F"/>
+                </a:solidFill>
+                <a:latin typeface="Courier"/>
+              </a:rPr>
+              <a:t>leaf_df </a:t>
+            </a:r>
+            <a:r>
+              <a:rPr>
+                <a:solidFill>
+                  <a:srgbClr val="5E5E5E"/>
+                </a:solidFill>
+                <a:latin typeface="Courier"/>
+              </a:rPr>
+              <a:t>%&gt;%</a:t>
+            </a:r>
+            <a:br/>
+            <a:r>
+              <a:rPr>
+                <a:solidFill>
+                  <a:srgbClr val="003B4F"/>
+                </a:solidFill>
+                <a:latin typeface="Courier"/>
+              </a:rPr>
+              <a:t>  </a:t>
+            </a:r>
+            <a:r>
+              <a:rPr>
+                <a:solidFill>
+                  <a:srgbClr val="4758AB"/>
+                </a:solidFill>
+                <a:latin typeface="Courier"/>
+              </a:rPr>
+              <a:t>ggplot</a:t>
+            </a:r>
+            <a:r>
+              <a:rPr>
+                <a:solidFill>
+                  <a:srgbClr val="003B4F"/>
+                </a:solidFill>
+                <a:latin typeface="Courier"/>
+              </a:rPr>
+              <a:t>(</a:t>
+            </a:r>
+            <a:r>
+              <a:rPr>
+                <a:solidFill>
+                  <a:srgbClr val="4758AB"/>
+                </a:solidFill>
+                <a:latin typeface="Courier"/>
+              </a:rPr>
+              <a:t>aes</a:t>
+            </a:r>
+            <a:r>
+              <a:rPr>
+                <a:solidFill>
+                  <a:srgbClr val="003B4F"/>
+                </a:solidFill>
+                <a:latin typeface="Courier"/>
+              </a:rPr>
+              <a:t>(</a:t>
+            </a:r>
+            <a:r>
+              <a:rPr>
+                <a:solidFill>
+                  <a:srgbClr val="657422"/>
+                </a:solidFill>
+                <a:latin typeface="Courier"/>
+              </a:rPr>
+              <a:t>x =</a:t>
+            </a:r>
+            <a:r>
+              <a:rPr>
+                <a:solidFill>
+                  <a:srgbClr val="003B4F"/>
+                </a:solidFill>
+                <a:latin typeface="Courier"/>
+              </a:rPr>
+              <a:t> shade, </a:t>
+            </a:r>
+            <a:r>
+              <a:rPr>
+                <a:solidFill>
+                  <a:srgbClr val="657422"/>
+                </a:solidFill>
+                <a:latin typeface="Courier"/>
+              </a:rPr>
+              <a:t>y =</a:t>
+            </a:r>
+            <a:r>
+              <a:rPr>
+                <a:solidFill>
+                  <a:srgbClr val="003B4F"/>
+                </a:solidFill>
+                <a:latin typeface="Courier"/>
+              </a:rPr>
+              <a:t> mass_g, </a:t>
+            </a:r>
+            <a:r>
+              <a:rPr>
+                <a:solidFill>
+                  <a:srgbClr val="657422"/>
+                </a:solidFill>
+                <a:latin typeface="Courier"/>
+              </a:rPr>
+              <a:t>fill =</a:t>
+            </a:r>
+            <a:r>
+              <a:rPr>
+                <a:solidFill>
+                  <a:srgbClr val="003B4F"/>
+                </a:solidFill>
+                <a:latin typeface="Courier"/>
+              </a:rPr>
+              <a:t> shade)) </a:t>
+            </a:r>
+            <a:r>
+              <a:rPr>
+                <a:solidFill>
+                  <a:srgbClr val="5E5E5E"/>
+                </a:solidFill>
+                <a:latin typeface="Courier"/>
+              </a:rPr>
+              <a:t>+</a:t>
+            </a:r>
+            <a:br/>
+            <a:r>
+              <a:rPr>
+                <a:solidFill>
+                  <a:srgbClr val="003B4F"/>
+                </a:solidFill>
+                <a:latin typeface="Courier"/>
+              </a:rPr>
+              <a:t>  </a:t>
+            </a:r>
+            <a:r>
+              <a:rPr>
+                <a:solidFill>
+                  <a:srgbClr val="4758AB"/>
+                </a:solidFill>
+                <a:latin typeface="Courier"/>
+              </a:rPr>
+              <a:t>geom_boxplot</a:t>
+            </a:r>
+            <a:r>
+              <a:rPr>
+                <a:solidFill>
+                  <a:srgbClr val="003B4F"/>
+                </a:solidFill>
+                <a:latin typeface="Courier"/>
+              </a:rPr>
+              <a:t>(</a:t>
+            </a:r>
+            <a:r>
+              <a:rPr>
+                <a:solidFill>
+                  <a:srgbClr val="657422"/>
+                </a:solidFill>
+                <a:latin typeface="Courier"/>
+              </a:rPr>
+              <a:t>alpha =</a:t>
+            </a:r>
+            <a:r>
+              <a:rPr>
+                <a:solidFill>
+                  <a:srgbClr val="003B4F"/>
+                </a:solidFill>
+                <a:latin typeface="Courier"/>
+              </a:rPr>
+              <a:t> </a:t>
+            </a:r>
+            <a:r>
+              <a:rPr>
+                <a:solidFill>
+                  <a:srgbClr val="AD0000"/>
+                </a:solidFill>
+                <a:latin typeface="Courier"/>
+              </a:rPr>
+              <a:t>0.6</a:t>
+            </a:r>
+            <a:r>
+              <a:rPr>
+                <a:solidFill>
+                  <a:srgbClr val="003B4F"/>
+                </a:solidFill>
+                <a:latin typeface="Courier"/>
+              </a:rPr>
+              <a:t>, </a:t>
+            </a:r>
+            <a:r>
+              <a:rPr>
+                <a:solidFill>
+                  <a:srgbClr val="657422"/>
+                </a:solidFill>
+                <a:latin typeface="Courier"/>
+              </a:rPr>
+              <a:t>outlier.shape =</a:t>
+            </a:r>
+            <a:r>
+              <a:rPr>
+                <a:solidFill>
+                  <a:srgbClr val="003B4F"/>
+                </a:solidFill>
+                <a:latin typeface="Courier"/>
+              </a:rPr>
+              <a:t> </a:t>
+            </a:r>
+            <a:r>
+              <a:rPr>
+                <a:solidFill>
+                  <a:srgbClr val="8F5902"/>
+                </a:solidFill>
+                <a:latin typeface="Courier"/>
+              </a:rPr>
+              <a:t>NA</a:t>
+            </a:r>
+            <a:r>
+              <a:rPr>
+                <a:solidFill>
+                  <a:srgbClr val="003B4F"/>
+                </a:solidFill>
+                <a:latin typeface="Courier"/>
+              </a:rPr>
+              <a:t>) </a:t>
+            </a:r>
+            <a:r>
+              <a:rPr>
+                <a:solidFill>
+                  <a:srgbClr val="5E5E5E"/>
+                </a:solidFill>
+                <a:latin typeface="Courier"/>
+              </a:rPr>
+              <a:t>+</a:t>
+            </a:r>
+            <a:br/>
+            <a:r>
+              <a:rPr>
+                <a:solidFill>
+                  <a:srgbClr val="003B4F"/>
+                </a:solidFill>
+                <a:latin typeface="Courier"/>
+              </a:rPr>
+              <a:t>  </a:t>
+            </a:r>
+            <a:r>
+              <a:rPr>
+                <a:solidFill>
+                  <a:srgbClr val="4758AB"/>
+                </a:solidFill>
+                <a:latin typeface="Courier"/>
+              </a:rPr>
+              <a:t>geom_jitter</a:t>
+            </a:r>
+            <a:r>
+              <a:rPr>
+                <a:solidFill>
+                  <a:srgbClr val="003B4F"/>
+                </a:solidFill>
+                <a:latin typeface="Courier"/>
+              </a:rPr>
+              <a:t>(</a:t>
+            </a:r>
+            <a:r>
+              <a:rPr>
+                <a:solidFill>
+                  <a:srgbClr val="657422"/>
+                </a:solidFill>
+                <a:latin typeface="Courier"/>
+              </a:rPr>
+              <a:t>width =</a:t>
+            </a:r>
+            <a:r>
+              <a:rPr>
+                <a:solidFill>
+                  <a:srgbClr val="003B4F"/>
+                </a:solidFill>
+                <a:latin typeface="Courier"/>
+              </a:rPr>
+              <a:t> </a:t>
+            </a:r>
+            <a:r>
+              <a:rPr>
+                <a:solidFill>
+                  <a:srgbClr val="AD0000"/>
+                </a:solidFill>
+                <a:latin typeface="Courier"/>
+              </a:rPr>
+              <a:t>0.15</a:t>
+            </a:r>
+            <a:r>
+              <a:rPr>
+                <a:solidFill>
+                  <a:srgbClr val="003B4F"/>
+                </a:solidFill>
+                <a:latin typeface="Courier"/>
+              </a:rPr>
+              <a:t>, </a:t>
+            </a:r>
+            <a:r>
+              <a:rPr>
+                <a:solidFill>
+                  <a:srgbClr val="657422"/>
+                </a:solidFill>
+                <a:latin typeface="Courier"/>
+              </a:rPr>
+              <a:t>alpha =</a:t>
+            </a:r>
+            <a:r>
+              <a:rPr>
+                <a:solidFill>
+                  <a:srgbClr val="003B4F"/>
+                </a:solidFill>
+                <a:latin typeface="Courier"/>
+              </a:rPr>
+              <a:t> </a:t>
+            </a:r>
+            <a:r>
+              <a:rPr>
+                <a:solidFill>
+                  <a:srgbClr val="AD0000"/>
+                </a:solidFill>
+                <a:latin typeface="Courier"/>
+              </a:rPr>
+              <a:t>0.6</a:t>
+            </a:r>
+            <a:r>
+              <a:rPr>
+                <a:solidFill>
+                  <a:srgbClr val="003B4F"/>
+                </a:solidFill>
+                <a:latin typeface="Courier"/>
+              </a:rPr>
+              <a:t>)</a:t>
+            </a:r>
+            <a:br/>
+            <a:r>
+              <a:rPr>
+                <a:solidFill>
+                  <a:srgbClr val="5E5E5E"/>
+                </a:solidFill>
+                <a:latin typeface="Courier"/>
+              </a:rPr>
+              <a:t>```</a:t>
+            </a:r>
+          </a:p>
+        </p:txBody>
+      </p:sp>
+      <p:pic>
+        <p:nvPicPr>
+          <p:cNvPr descr="quarto_lecture_files/figure-pptx/fig-boxplot-1.png" id="0" name="Picture 1"/>
+          <p:cNvPicPr>
+            <a:picLocks noGrp="1" noChangeAspect="1"/>
+          </p:cNvPicPr>
+          <p:nvPr/>
+        </p:nvPicPr>
+        <p:blipFill>
+          <a:blip r:embed="rId2"/>
+          <a:stretch>
+            <a:fillRect/>
+          </a:stretch>
+        </p:blipFill>
+        <p:spPr bwMode="auto">
+          <a:xfrm>
+            <a:off x="3606800" y="2819400"/>
+            <a:ext cx="1790700" cy="1435100"/>
+          </a:xfrm>
+          <a:prstGeom prst="rect">
+            <a:avLst/>
+          </a:prstGeom>
+          <a:noFill/>
+          <a:ln w="9525">
+            <a:noFill/>
+            <a:headEnd/>
+            <a:tailEnd/>
+          </a:ln>
+        </p:spPr>
+      </p:pic>
+      <p:sp>
+        <p:nvSpPr>
+          <p:cNvPr id="1" name="TextBox 3"/>
+          <p:cNvSpPr txBox="1"/>
+          <p:nvPr>
+            <p:ph idx="1"/>
+          </p:nvPr>
+        </p:nvSpPr>
+        <p:spPr>
+          <a:xfrm>
+            <a:off x="127000" y="4254500"/>
+            <a:ext cx="8750300" cy="508000"/>
+          </a:xfrm>
+          <a:prstGeom prst="rect">
+            <a:avLst/>
+          </a:prstGeom>
+          <a:noFill/>
+        </p:spPr>
+        <p:txBody>
+          <a:bodyPr/>
+          <a:lstStyle/>
+          <a:p>
+            <a:pPr lvl="0" indent="0" marL="0" algn="ctr">
+              <a:buNone/>
+            </a:pPr>
+            <a:r>
+              <a:rPr/>
+              <a:t>Figure 1: Leaf mass by side; each point is one leaf.</a:t>
             </a:r>
           </a:p>
         </p:txBody>
@@ -7365,12 +7820,12 @@
       </p:grpSpPr>
       <p:sp>
         <p:nvSpPr>
-          <p:cNvPr id="3" name="Text Placeholder 2"/>
+          <p:cNvPr id="3" name="Content Placeholder 2"/>
           <p:cNvSpPr>
             <a:spLocks noGrp="1"/>
           </p:cNvSpPr>
           <p:nvPr>
-            <p:ph idx="1" type="body"/>
+            <p:ph idx="1"/>
           </p:nvPr>
         </p:nvSpPr>
         <p:spPr/>
@@ -7378,935 +7833,63 @@
           <a:bodyPr/>
           <a:lstStyle/>
           <a:p>
-            <a:pPr lvl="0" indent="0">
-              <a:buNone/>
-            </a:pPr>
-            <a:r>
-              <a:rPr>
-                <a:solidFill>
-                  <a:srgbClr val="5E5E5E"/>
-                </a:solidFill>
-                <a:latin typeface="Courier"/>
-              </a:rPr>
-              <a:t>```{r}</a:t>
-            </a:r>
-            <a:br/>
-            <a:r>
-              <a:rPr>
-                <a:solidFill>
-                  <a:srgbClr val="5E5E5E"/>
-                </a:solidFill>
-                <a:latin typeface="Courier"/>
-              </a:rPr>
-              <a:t>#| label: fig-boxplot</a:t>
-            </a:r>
-            <a:br/>
-            <a:r>
-              <a:rPr>
-                <a:solidFill>
-                  <a:srgbClr val="5E5E5E"/>
-                </a:solidFill>
-                <a:latin typeface="Courier"/>
-              </a:rPr>
-              <a:t>#| fig-cap: "Leaf mass by side; each point is one leaf."</a:t>
-            </a:r>
-            <a:br/>
-            <a:r>
-              <a:rPr>
-                <a:solidFill>
-                  <a:srgbClr val="5E5E5E"/>
-                </a:solidFill>
-                <a:latin typeface="Courier"/>
-              </a:rPr>
-              <a:t>#| fig-width: 5</a:t>
-            </a:r>
-            <a:br/>
-            <a:r>
-              <a:rPr>
-                <a:solidFill>
-                  <a:srgbClr val="5E5E5E"/>
-                </a:solidFill>
-                <a:latin typeface="Courier"/>
-              </a:rPr>
-              <a:t>#| fig-height: 4</a:t>
-            </a:r>
-            <a:br/>
-            <a:r>
-              <a:rPr>
-                <a:solidFill>
-                  <a:srgbClr val="5E5E5E"/>
-                </a:solidFill>
-                <a:latin typeface="Courier"/>
-              </a:rPr>
-              <a:t># box plot with raw points on top ----</a:t>
-            </a:r>
-            <a:br/>
-            <a:r>
-              <a:rPr>
-                <a:solidFill>
-                  <a:srgbClr val="003B4F"/>
-                </a:solidFill>
-                <a:latin typeface="Courier"/>
-              </a:rPr>
-              <a:t>leaf_df </a:t>
-            </a:r>
-            <a:r>
-              <a:rPr>
-                <a:solidFill>
-                  <a:srgbClr val="5E5E5E"/>
-                </a:solidFill>
-                <a:latin typeface="Courier"/>
-              </a:rPr>
-              <a:t>%&gt;%</a:t>
-            </a:r>
-            <a:br/>
-            <a:r>
-              <a:rPr>
-                <a:solidFill>
-                  <a:srgbClr val="003B4F"/>
-                </a:solidFill>
-                <a:latin typeface="Courier"/>
-              </a:rPr>
-              <a:t>  </a:t>
-            </a:r>
-            <a:r>
-              <a:rPr>
-                <a:solidFill>
-                  <a:srgbClr val="4758AB"/>
-                </a:solidFill>
-                <a:latin typeface="Courier"/>
-              </a:rPr>
-              <a:t>ggplot</a:t>
-            </a:r>
-            <a:r>
-              <a:rPr>
-                <a:solidFill>
-                  <a:srgbClr val="003B4F"/>
-                </a:solidFill>
-                <a:latin typeface="Courier"/>
-              </a:rPr>
-              <a:t>(</a:t>
-            </a:r>
-            <a:r>
-              <a:rPr>
-                <a:solidFill>
-                  <a:srgbClr val="4758AB"/>
-                </a:solidFill>
-                <a:latin typeface="Courier"/>
-              </a:rPr>
-              <a:t>aes</a:t>
-            </a:r>
-            <a:r>
-              <a:rPr>
-                <a:solidFill>
-                  <a:srgbClr val="003B4F"/>
-                </a:solidFill>
-                <a:latin typeface="Courier"/>
-              </a:rPr>
-              <a:t>(</a:t>
-            </a:r>
-            <a:r>
-              <a:rPr>
-                <a:solidFill>
-                  <a:srgbClr val="657422"/>
-                </a:solidFill>
-                <a:latin typeface="Courier"/>
-              </a:rPr>
-              <a:t>x =</a:t>
-            </a:r>
-            <a:r>
-              <a:rPr>
-                <a:solidFill>
-                  <a:srgbClr val="003B4F"/>
-                </a:solidFill>
-                <a:latin typeface="Courier"/>
-              </a:rPr>
-              <a:t> shade, </a:t>
-            </a:r>
-            <a:r>
-              <a:rPr>
-                <a:solidFill>
-                  <a:srgbClr val="657422"/>
-                </a:solidFill>
-                <a:latin typeface="Courier"/>
-              </a:rPr>
-              <a:t>y =</a:t>
-            </a:r>
-            <a:r>
-              <a:rPr>
-                <a:solidFill>
-                  <a:srgbClr val="003B4F"/>
-                </a:solidFill>
-                <a:latin typeface="Courier"/>
-              </a:rPr>
-              <a:t> mass_g, </a:t>
-            </a:r>
-            <a:r>
-              <a:rPr>
-                <a:solidFill>
-                  <a:srgbClr val="657422"/>
-                </a:solidFill>
-                <a:latin typeface="Courier"/>
-              </a:rPr>
-              <a:t>fill =</a:t>
-            </a:r>
-            <a:r>
-              <a:rPr>
-                <a:solidFill>
-                  <a:srgbClr val="003B4F"/>
-                </a:solidFill>
-                <a:latin typeface="Courier"/>
-              </a:rPr>
-              <a:t> shade)) </a:t>
-            </a:r>
-            <a:r>
-              <a:rPr>
-                <a:solidFill>
-                  <a:srgbClr val="5E5E5E"/>
-                </a:solidFill>
-                <a:latin typeface="Courier"/>
-              </a:rPr>
-              <a:t>+</a:t>
-            </a:r>
-            <a:br/>
-            <a:r>
-              <a:rPr>
-                <a:solidFill>
-                  <a:srgbClr val="003B4F"/>
-                </a:solidFill>
-                <a:latin typeface="Courier"/>
-              </a:rPr>
-              <a:t>  </a:t>
-            </a:r>
-            <a:r>
-              <a:rPr>
-                <a:solidFill>
-                  <a:srgbClr val="4758AB"/>
-                </a:solidFill>
-                <a:latin typeface="Courier"/>
-              </a:rPr>
-              <a:t>geom_boxplot</a:t>
-            </a:r>
-            <a:r>
-              <a:rPr>
-                <a:solidFill>
-                  <a:srgbClr val="003B4F"/>
-                </a:solidFill>
-                <a:latin typeface="Courier"/>
-              </a:rPr>
-              <a:t>(</a:t>
-            </a:r>
-            <a:r>
-              <a:rPr>
-                <a:solidFill>
-                  <a:srgbClr val="657422"/>
-                </a:solidFill>
-                <a:latin typeface="Courier"/>
-              </a:rPr>
-              <a:t>alpha =</a:t>
-            </a:r>
-            <a:r>
-              <a:rPr>
-                <a:solidFill>
-                  <a:srgbClr val="003B4F"/>
-                </a:solidFill>
-                <a:latin typeface="Courier"/>
-              </a:rPr>
-              <a:t> </a:t>
-            </a:r>
-            <a:r>
-              <a:rPr>
-                <a:solidFill>
-                  <a:srgbClr val="AD0000"/>
-                </a:solidFill>
-                <a:latin typeface="Courier"/>
-              </a:rPr>
-              <a:t>0.6</a:t>
-            </a:r>
-            <a:r>
-              <a:rPr>
-                <a:solidFill>
-                  <a:srgbClr val="003B4F"/>
-                </a:solidFill>
-                <a:latin typeface="Courier"/>
-              </a:rPr>
+            <a:pPr lvl="0"/>
+            <a:r>
+              <a:rPr/>
+              <a:t>🔮 </a:t>
+            </a:r>
+            <a:r>
+              <a:rPr b="1"/>
+              <a:t>Predict:</a:t>
+            </a:r>
+            <a:r>
+              <a:rPr/>
+              <a:t> the label starts with </a:t>
+            </a:r>
+            <a:r>
+              <a:rPr>
+                <a:latin typeface="Courier"/>
+              </a:rPr>
+              <a:t>fig-</a:t>
+            </a:r>
+            <a:r>
+              <a:rPr/>
+              <a:t> — what does the caption start with?</a:t>
+            </a:r>
+          </a:p>
+          <a:p>
+            <a:pPr lvl="0"/>
+            <a:r>
+              <a:rPr/>
+              <a:t>✏️ </a:t>
+            </a:r>
+            <a:r>
+              <a:rPr b="1"/>
+              <a:t>You add:</a:t>
+            </a:r>
+            <a:r>
+              <a:rPr/>
+              <a:t> your two colors, </a:t>
+            </a:r>
+            <a:r>
+              <a:rPr>
+                <a:latin typeface="Courier"/>
+              </a:rPr>
+              <a:t>labs()</a:t>
+            </a:r>
+            <a:r>
+              <a:rPr/>
               <a:t>, </a:t>
             </a:r>
             <a:r>
               <a:rPr>
-                <a:solidFill>
-                  <a:srgbClr val="657422"/>
-                </a:solidFill>
-                <a:latin typeface="Courier"/>
-              </a:rPr>
-              <a:t>outlier.shape =</a:t>
-            </a:r>
-            <a:r>
-              <a:rPr>
-                <a:solidFill>
-                  <a:srgbClr val="003B4F"/>
-                </a:solidFill>
-                <a:latin typeface="Courier"/>
-              </a:rPr>
-              <a:t> </a:t>
-            </a:r>
-            <a:r>
-              <a:rPr>
-                <a:solidFill>
-                  <a:srgbClr val="8F5902"/>
-                </a:solidFill>
-                <a:latin typeface="Courier"/>
-              </a:rPr>
-              <a:t>NA</a:t>
-            </a:r>
-            <a:r>
-              <a:rPr>
-                <a:solidFill>
-                  <a:srgbClr val="003B4F"/>
-                </a:solidFill>
-                <a:latin typeface="Courier"/>
-              </a:rPr>
-              <a:t>) </a:t>
-            </a:r>
-            <a:r>
-              <a:rPr>
-                <a:solidFill>
-                  <a:srgbClr val="5E5E5E"/>
-                </a:solidFill>
-                <a:latin typeface="Courier"/>
-              </a:rPr>
-              <a:t>+</a:t>
-            </a:r>
-            <a:br/>
-            <a:r>
-              <a:rPr>
-                <a:solidFill>
-                  <a:srgbClr val="003B4F"/>
-                </a:solidFill>
-                <a:latin typeface="Courier"/>
-              </a:rPr>
-              <a:t>  </a:t>
-            </a:r>
-            <a:r>
-              <a:rPr>
-                <a:solidFill>
-                  <a:srgbClr val="4758AB"/>
-                </a:solidFill>
-                <a:latin typeface="Courier"/>
-              </a:rPr>
-              <a:t>geom_jitter</a:t>
-            </a:r>
-            <a:r>
-              <a:rPr>
-                <a:solidFill>
-                  <a:srgbClr val="003B4F"/>
-                </a:solidFill>
-                <a:latin typeface="Courier"/>
-              </a:rPr>
-              <a:t>(</a:t>
-            </a:r>
-            <a:r>
-              <a:rPr>
-                <a:solidFill>
-                  <a:srgbClr val="657422"/>
-                </a:solidFill>
-                <a:latin typeface="Courier"/>
-              </a:rPr>
-              <a:t>width =</a:t>
-            </a:r>
-            <a:r>
-              <a:rPr>
-                <a:solidFill>
-                  <a:srgbClr val="003B4F"/>
-                </a:solidFill>
-                <a:latin typeface="Courier"/>
-              </a:rPr>
-              <a:t> </a:t>
-            </a:r>
-            <a:r>
-              <a:rPr>
-                <a:solidFill>
-                  <a:srgbClr val="AD0000"/>
-                </a:solidFill>
-                <a:latin typeface="Courier"/>
-              </a:rPr>
-              <a:t>0.15</a:t>
-            </a:r>
-            <a:r>
-              <a:rPr>
-                <a:solidFill>
-                  <a:srgbClr val="003B4F"/>
-                </a:solidFill>
-                <a:latin typeface="Courier"/>
-              </a:rPr>
-              <a:t>, </a:t>
-            </a:r>
-            <a:r>
-              <a:rPr>
-                <a:solidFill>
-                  <a:srgbClr val="657422"/>
-                </a:solidFill>
-                <a:latin typeface="Courier"/>
-              </a:rPr>
-              <a:t>alpha =</a:t>
-            </a:r>
-            <a:r>
-              <a:rPr>
-                <a:solidFill>
-                  <a:srgbClr val="003B4F"/>
-                </a:solidFill>
-                <a:latin typeface="Courier"/>
-              </a:rPr>
-              <a:t> </a:t>
-            </a:r>
-            <a:r>
-              <a:rPr>
-                <a:solidFill>
-                  <a:srgbClr val="AD0000"/>
-                </a:solidFill>
-                <a:latin typeface="Courier"/>
-              </a:rPr>
-              <a:t>0.6</a:t>
-            </a:r>
-            <a:r>
-              <a:rPr>
-                <a:solidFill>
-                  <a:srgbClr val="003B4F"/>
-                </a:solidFill>
-                <a:latin typeface="Courier"/>
-              </a:rPr>
-              <a:t>) </a:t>
-            </a:r>
-            <a:r>
-              <a:rPr>
-                <a:solidFill>
-                  <a:srgbClr val="5E5E5E"/>
-                </a:solidFill>
-                <a:latin typeface="Courier"/>
-              </a:rPr>
-              <a:t>+</a:t>
-            </a:r>
-            <a:br/>
-            <a:r>
-              <a:rPr>
-                <a:solidFill>
-                  <a:srgbClr val="003B4F"/>
-                </a:solidFill>
-                <a:latin typeface="Courier"/>
-              </a:rPr>
-              <a:t>  </a:t>
-            </a:r>
-            <a:r>
-              <a:rPr>
-                <a:solidFill>
-                  <a:srgbClr val="4758AB"/>
-                </a:solidFill>
-                <a:latin typeface="Courier"/>
-              </a:rPr>
-              <a:t>scale_fill_manual</a:t>
-            </a:r>
-            <a:r>
-              <a:rPr>
-                <a:solidFill>
-                  <a:srgbClr val="003B4F"/>
-                </a:solidFill>
-                <a:latin typeface="Courier"/>
-              </a:rPr>
-              <a:t>(</a:t>
-            </a:r>
-            <a:r>
-              <a:rPr>
-                <a:solidFill>
-                  <a:srgbClr val="657422"/>
-                </a:solidFill>
-                <a:latin typeface="Courier"/>
-              </a:rPr>
-              <a:t>values =</a:t>
-            </a:r>
-            <a:r>
-              <a:rPr>
-                <a:solidFill>
-                  <a:srgbClr val="003B4F"/>
-                </a:solidFill>
-                <a:latin typeface="Courier"/>
-              </a:rPr>
-              <a:t> </a:t>
-            </a:r>
-            <a:r>
-              <a:rPr>
-                <a:solidFill>
-                  <a:srgbClr val="4758AB"/>
-                </a:solidFill>
-                <a:latin typeface="Courier"/>
-              </a:rPr>
-              <a:t>c</a:t>
-            </a:r>
-            <a:r>
-              <a:rPr>
-                <a:solidFill>
-                  <a:srgbClr val="003B4F"/>
-                </a:solidFill>
-                <a:latin typeface="Courier"/>
-              </a:rPr>
-              <a:t>(</a:t>
-            </a:r>
-            <a:r>
-              <a:rPr>
-                <a:solidFill>
-                  <a:srgbClr val="20794D"/>
-                </a:solidFill>
-                <a:latin typeface="Courier"/>
-              </a:rPr>
-              <a:t>"sunny"</a:t>
-            </a:r>
-            <a:r>
-              <a:rPr>
-                <a:solidFill>
-                  <a:srgbClr val="003B4F"/>
-                </a:solidFill>
-                <a:latin typeface="Courier"/>
-              </a:rPr>
-              <a:t> = </a:t>
-            </a:r>
-            <a:r>
-              <a:rPr>
-                <a:solidFill>
-                  <a:srgbClr val="20794D"/>
-                </a:solidFill>
-                <a:latin typeface="Courier"/>
-              </a:rPr>
-              <a:t>"goldenrod"</a:t>
-            </a:r>
-            <a:r>
-              <a:rPr>
-                <a:solidFill>
-                  <a:srgbClr val="003B4F"/>
-                </a:solidFill>
-                <a:latin typeface="Courier"/>
-              </a:rPr>
-              <a:t>,</a:t>
-            </a:r>
-            <a:br/>
-            <a:r>
-              <a:rPr>
-                <a:solidFill>
-                  <a:srgbClr val="003B4F"/>
-                </a:solidFill>
-                <a:latin typeface="Courier"/>
-              </a:rPr>
-              <a:t>                               </a:t>
-            </a:r>
-            <a:r>
-              <a:rPr>
-                <a:solidFill>
-                  <a:srgbClr val="20794D"/>
-                </a:solidFill>
-                <a:latin typeface="Courier"/>
-              </a:rPr>
-              <a:t>"shady"</a:t>
-            </a:r>
-            <a:r>
-              <a:rPr>
-                <a:solidFill>
-                  <a:srgbClr val="003B4F"/>
-                </a:solidFill>
-                <a:latin typeface="Courier"/>
-              </a:rPr>
-              <a:t> = </a:t>
-            </a:r>
-            <a:r>
-              <a:rPr>
-                <a:solidFill>
-                  <a:srgbClr val="20794D"/>
-                </a:solidFill>
-                <a:latin typeface="Courier"/>
-              </a:rPr>
-              <a:t>"forestgreen"</a:t>
-            </a:r>
-            <a:r>
-              <a:rPr>
-                <a:solidFill>
-                  <a:srgbClr val="003B4F"/>
-                </a:solidFill>
-                <a:latin typeface="Courier"/>
-              </a:rPr>
-              <a:t>)) </a:t>
-            </a:r>
-            <a:r>
-              <a:rPr>
-                <a:solidFill>
-                  <a:srgbClr val="5E5E5E"/>
-                </a:solidFill>
-                <a:latin typeface="Courier"/>
-              </a:rPr>
-              <a:t>+</a:t>
-            </a:r>
-            <a:br/>
-            <a:r>
-              <a:rPr>
-                <a:solidFill>
-                  <a:srgbClr val="003B4F"/>
-                </a:solidFill>
-                <a:latin typeface="Courier"/>
-              </a:rPr>
-              <a:t>  </a:t>
-            </a:r>
-            <a:r>
-              <a:rPr>
-                <a:solidFill>
-                  <a:srgbClr val="4758AB"/>
-                </a:solidFill>
-                <a:latin typeface="Courier"/>
-              </a:rPr>
-              <a:t>labs</a:t>
-            </a:r>
-            <a:r>
-              <a:rPr>
-                <a:solidFill>
-                  <a:srgbClr val="003B4F"/>
-                </a:solidFill>
-                <a:latin typeface="Courier"/>
-              </a:rPr>
-              <a:t>(</a:t>
-            </a:r>
-            <a:r>
-              <a:rPr>
-                <a:solidFill>
-                  <a:srgbClr val="657422"/>
-                </a:solidFill>
-                <a:latin typeface="Courier"/>
-              </a:rPr>
-              <a:t>x =</a:t>
-            </a:r>
-            <a:r>
-              <a:rPr>
-                <a:solidFill>
-                  <a:srgbClr val="003B4F"/>
-                </a:solidFill>
-                <a:latin typeface="Courier"/>
-              </a:rPr>
-              <a:t> </a:t>
-            </a:r>
-            <a:r>
-              <a:rPr>
-                <a:solidFill>
-                  <a:srgbClr val="20794D"/>
-                </a:solidFill>
-                <a:latin typeface="Courier"/>
-              </a:rPr>
-              <a:t>"Side of tree"</a:t>
-            </a:r>
-            <a:r>
-              <a:rPr>
-                <a:solidFill>
-                  <a:srgbClr val="003B4F"/>
-                </a:solidFill>
-                <a:latin typeface="Courier"/>
-              </a:rPr>
-              <a:t>, </a:t>
-            </a:r>
-            <a:r>
-              <a:rPr>
-                <a:solidFill>
-                  <a:srgbClr val="657422"/>
-                </a:solidFill>
-                <a:latin typeface="Courier"/>
-              </a:rPr>
-              <a:t>y =</a:t>
-            </a:r>
-            <a:r>
-              <a:rPr>
-                <a:solidFill>
-                  <a:srgbClr val="003B4F"/>
-                </a:solidFill>
-                <a:latin typeface="Courier"/>
-              </a:rPr>
-              <a:t> </a:t>
-            </a:r>
-            <a:r>
-              <a:rPr>
-                <a:solidFill>
-                  <a:srgbClr val="20794D"/>
-                </a:solidFill>
-                <a:latin typeface="Courier"/>
-              </a:rPr>
-              <a:t>"Leaf mass (g)"</a:t>
-            </a:r>
-            <a:r>
-              <a:rPr>
-                <a:solidFill>
-                  <a:srgbClr val="003B4F"/>
-                </a:solidFill>
-                <a:latin typeface="Courier"/>
-              </a:rPr>
-              <a:t>) </a:t>
-            </a:r>
-            <a:r>
-              <a:rPr>
-                <a:solidFill>
-                  <a:srgbClr val="5E5E5E"/>
-                </a:solidFill>
-                <a:latin typeface="Courier"/>
-              </a:rPr>
-              <a:t>+</a:t>
-            </a:r>
-            <a:br/>
-            <a:r>
-              <a:rPr>
-                <a:solidFill>
-                  <a:srgbClr val="003B4F"/>
-                </a:solidFill>
-                <a:latin typeface="Courier"/>
-              </a:rPr>
-              <a:t>  </a:t>
-            </a:r>
-            <a:r>
-              <a:rPr>
-                <a:solidFill>
-                  <a:srgbClr val="4758AB"/>
-                </a:solidFill>
-                <a:latin typeface="Courier"/>
-              </a:rPr>
-              <a:t>theme_regular</a:t>
-            </a:r>
-            <a:r>
-              <a:rPr>
-                <a:solidFill>
-                  <a:srgbClr val="003B4F"/>
-                </a:solidFill>
-                <a:latin typeface="Courier"/>
-              </a:rPr>
-              <a:t>() </a:t>
-            </a:r>
-            <a:r>
-              <a:rPr>
-                <a:solidFill>
-                  <a:srgbClr val="5E5E5E"/>
-                </a:solidFill>
-                <a:latin typeface="Courier"/>
-              </a:rPr>
-              <a:t>+</a:t>
-            </a:r>
-            <a:br/>
-            <a:r>
-              <a:rPr>
-                <a:solidFill>
-                  <a:srgbClr val="003B4F"/>
-                </a:solidFill>
-                <a:latin typeface="Courier"/>
-              </a:rPr>
-              <a:t>  </a:t>
-            </a:r>
-            <a:r>
-              <a:rPr>
-                <a:solidFill>
-                  <a:srgbClr val="4758AB"/>
-                </a:solidFill>
-                <a:latin typeface="Courier"/>
-              </a:rPr>
-              <a:t>theme</a:t>
-            </a:r>
-            <a:r>
-              <a:rPr>
-                <a:solidFill>
-                  <a:srgbClr val="003B4F"/>
-                </a:solidFill>
-                <a:latin typeface="Courier"/>
-              </a:rPr>
-              <a:t>(</a:t>
-            </a:r>
-            <a:r>
-              <a:rPr>
-                <a:solidFill>
-                  <a:srgbClr val="657422"/>
-                </a:solidFill>
-                <a:latin typeface="Courier"/>
-              </a:rPr>
-              <a:t>legend.position =</a:t>
-            </a:r>
-            <a:r>
-              <a:rPr>
-                <a:solidFill>
-                  <a:srgbClr val="003B4F"/>
-                </a:solidFill>
-                <a:latin typeface="Courier"/>
-              </a:rPr>
-              <a:t> </a:t>
-            </a:r>
-            <a:r>
-              <a:rPr>
-                <a:solidFill>
-                  <a:srgbClr val="20794D"/>
-                </a:solidFill>
-                <a:latin typeface="Courier"/>
-              </a:rPr>
-              <a:t>"none"</a:t>
-            </a:r>
-            <a:r>
-              <a:rPr>
-                <a:solidFill>
-                  <a:srgbClr val="003B4F"/>
-                </a:solidFill>
-                <a:latin typeface="Courier"/>
-              </a:rPr>
-              <a:t>)</a:t>
-            </a:r>
-            <a:br/>
-            <a:r>
-              <a:rPr>
-                <a:solidFill>
-                  <a:srgbClr val="5E5E5E"/>
-                </a:solidFill>
-                <a:latin typeface="Courier"/>
-              </a:rPr>
-              <a:t>```</a:t>
-            </a:r>
-          </a:p>
-        </p:txBody>
-      </p:sp>
-      <p:pic>
-        <p:nvPicPr>
-          <p:cNvPr descr="quarto_lecture_files/figure-pptx/fig-boxplot-1.png" id="0" name="Picture 1"/>
-          <p:cNvPicPr>
-            <a:picLocks noGrp="1" noChangeAspect="1"/>
-          </p:cNvPicPr>
-          <p:nvPr/>
-        </p:nvPicPr>
-        <p:blipFill>
-          <a:blip r:embed="rId2"/>
-          <a:stretch>
-            <a:fillRect/>
-          </a:stretch>
-        </p:blipFill>
-        <p:spPr bwMode="auto">
-          <a:xfrm>
-            <a:off x="596900" y="1270000"/>
-            <a:ext cx="3492500" cy="2794000"/>
-          </a:xfrm>
-          <a:prstGeom prst="rect">
-            <a:avLst/>
-          </a:prstGeom>
-          <a:noFill/>
-          <a:ln w="9525">
-            <a:noFill/>
-            <a:headEnd/>
-            <a:tailEnd/>
-          </a:ln>
-        </p:spPr>
-      </p:pic>
-      <p:sp>
-        <p:nvSpPr>
-          <p:cNvPr id="1" name="TextBox 3"/>
-          <p:cNvSpPr txBox="1"/>
-          <p:nvPr>
-            <p:ph idx="1"/>
-          </p:nvPr>
-        </p:nvSpPr>
-        <p:spPr>
-          <a:xfrm>
-            <a:off x="127000" y="4064000"/>
-            <a:ext cx="4432300" cy="508000"/>
-          </a:xfrm>
-          <a:prstGeom prst="rect">
-            <a:avLst/>
-          </a:prstGeom>
-          <a:noFill/>
-        </p:spPr>
-        <p:txBody>
-          <a:bodyPr/>
-          <a:lstStyle/>
-          <a:p>
-            <a:pPr lvl="0" indent="0" marL="0" algn="ctr">
-              <a:buNone/>
-            </a:pPr>
-            <a:r>
-              <a:rPr/>
-              <a:t>Figure 1: Leaf mass by side; each point is one leaf.</a:t>
-            </a:r>
-          </a:p>
-        </p:txBody>
-      </p:sp>
-      <p:sp>
-        <p:nvSpPr>
-          <p:cNvPr id="5" name="Text Placeholder 4"/>
-          <p:cNvSpPr>
-            <a:spLocks noGrp="1"/>
-          </p:cNvSpPr>
-          <p:nvPr>
-            <p:ph idx="3" sz="quarter" type="body"/>
-          </p:nvPr>
-        </p:nvSpPr>
-        <p:spPr/>
-        <p:txBody>
-          <a:bodyPr/>
-          <a:lstStyle/>
-          <a:p>
-            <a:pPr lvl="0"/>
-            <a:r>
-              <a:rPr/>
-              <a:t>Same plot as Activity 03 — only the </a:t>
-            </a:r>
-            <a:r>
-              <a:rPr>
-                <a:latin typeface="Courier"/>
-              </a:rPr>
-              <a:t>#|</a:t>
-            </a:r>
-            <a:r>
-              <a:rPr/>
-              <a:t> lines are new</a:t>
-            </a:r>
-          </a:p>
-          <a:p>
-            <a:pPr lvl="0"/>
-            <a:r>
-              <a:rPr>
-                <a:latin typeface="Courier"/>
-              </a:rPr>
-              <a:t>fig-</a:t>
-            </a:r>
-            <a:r>
-              <a:rPr/>
-              <a:t> label → </a:t>
-            </a:r>
-            <a:r>
-              <a:rPr b="1"/>
-              <a:t>“Figure 1”</a:t>
-            </a:r>
-            <a:r>
-              <a:rPr/>
-              <a:t> in the caption</a:t>
-            </a:r>
-          </a:p>
-          <a:p>
-            <a:pPr lvl="0"/>
-            <a:r>
-              <a:rPr>
-                <a:latin typeface="Courier"/>
-              </a:rPr>
-              <a:t>fig-width</a:t>
-            </a:r>
-            <a:r>
-              <a:rPr/>
-              <a:t> / </a:t>
-            </a:r>
-            <a:r>
-              <a:rPr>
-                <a:latin typeface="Courier"/>
-              </a:rPr>
-              <a:t>fig-height</a:t>
-            </a:r>
-            <a:r>
-              <a:rPr/>
-              <a:t> size </a:t>
-            </a:r>
-            <a:r>
-              <a:rPr b="1"/>
-              <a:t>this</a:t>
-            </a:r>
-            <a:r>
-              <a:rPr/>
-              <a:t> plot only</a:t>
+                <a:latin typeface="Courier"/>
+              </a:rPr>
+              <a:t>theme_regular()</a:t>
+            </a:r>
+            <a:r>
+              <a:rPr/>
+              <a:t>, no legend</a:t>
             </a:r>
           </a:p>
         </p:txBody>
@@ -8345,8 +7928,8 @@
         </p:nvSpPr>
         <p:spPr>
           <a:xfrm>
-            <a:off x="139485" y="78119"/>
-            <a:ext cx="8229600" cy="607682"/>
+            <a:off x="0" y="0"/>
+            <a:ext cx="9144000" cy="871538"/>
           </a:xfrm>
         </p:spPr>
         <p:txBody>
@@ -8365,12 +7948,12 @@
       </p:sp>
       <p:sp>
         <p:nvSpPr>
-          <p:cNvPr id="3" name="Text Placeholder 2"/>
+          <p:cNvPr id="4" name="Text Placeholder 3"/>
           <p:cNvSpPr>
             <a:spLocks noGrp="1"/>
           </p:cNvSpPr>
           <p:nvPr>
-            <p:ph idx="1" type="body"/>
+            <p:ph idx="2" sz="half" type="body"/>
           </p:nvPr>
         </p:nvSpPr>
         <p:spPr/>
@@ -8408,7 +7991,7 @@
                 </a:solidFill>
                 <a:latin typeface="Courier"/>
               </a:rPr>
-              <a:t>#| fig-cap: "Mean leaf mass (± 1 SE) by side of the tree."</a:t>
+              <a:t>#| output-location: column</a:t>
             </a:r>
             <a:br/>
             <a:r>
@@ -8418,6 +8001,16 @@
                 </a:solidFill>
                 <a:latin typeface="Courier"/>
               </a:rPr>
+              <a:t>#| fig-cap: "Mean leaf mass (± 1 SE) by side."</a:t>
+            </a:r>
+            <a:br/>
+            <a:r>
+              <a:rPr>
+                <a:solidFill>
+                  <a:srgbClr val="5E5E5E"/>
+                </a:solidFill>
+                <a:latin typeface="Courier"/>
+              </a:rPr>
               <a:t>#| fig-width: 5</a:t>
             </a:r>
             <a:br/>
@@ -8994,380 +8587,6 @@
                 <a:latin typeface="Courier"/>
               </a:rPr>
               <a:t>0.9</a:t>
-            </a:r>
-            <a:r>
-              <a:rPr>
-                <a:solidFill>
-                  <a:srgbClr val="003B4F"/>
-                </a:solidFill>
-                <a:latin typeface="Courier"/>
-              </a:rPr>
-              <a:t>) </a:t>
-            </a:r>
-            <a:r>
-              <a:rPr>
-                <a:solidFill>
-                  <a:srgbClr val="5E5E5E"/>
-                </a:solidFill>
-                <a:latin typeface="Courier"/>
-              </a:rPr>
-              <a:t>+</a:t>
-            </a:r>
-            <a:br/>
-            <a:r>
-              <a:rPr>
-                <a:solidFill>
-                  <a:srgbClr val="003B4F"/>
-                </a:solidFill>
-                <a:latin typeface="Courier"/>
-              </a:rPr>
-              <a:t>  </a:t>
-            </a:r>
-            <a:r>
-              <a:rPr>
-                <a:solidFill>
-                  <a:srgbClr val="4758AB"/>
-                </a:solidFill>
-                <a:latin typeface="Courier"/>
-              </a:rPr>
-              <a:t>scale_color_manual</a:t>
-            </a:r>
-            <a:r>
-              <a:rPr>
-                <a:solidFill>
-                  <a:srgbClr val="003B4F"/>
-                </a:solidFill>
-                <a:latin typeface="Courier"/>
-              </a:rPr>
-              <a:t>(</a:t>
-            </a:r>
-            <a:r>
-              <a:rPr>
-                <a:solidFill>
-                  <a:srgbClr val="657422"/>
-                </a:solidFill>
-                <a:latin typeface="Courier"/>
-              </a:rPr>
-              <a:t>values =</a:t>
-            </a:r>
-            <a:r>
-              <a:rPr>
-                <a:solidFill>
-                  <a:srgbClr val="003B4F"/>
-                </a:solidFill>
-                <a:latin typeface="Courier"/>
-              </a:rPr>
-              <a:t> </a:t>
-            </a:r>
-            <a:r>
-              <a:rPr>
-                <a:solidFill>
-                  <a:srgbClr val="4758AB"/>
-                </a:solidFill>
-                <a:latin typeface="Courier"/>
-              </a:rPr>
-              <a:t>c</a:t>
-            </a:r>
-            <a:r>
-              <a:rPr>
-                <a:solidFill>
-                  <a:srgbClr val="003B4F"/>
-                </a:solidFill>
-                <a:latin typeface="Courier"/>
-              </a:rPr>
-              <a:t>(</a:t>
-            </a:r>
-            <a:r>
-              <a:rPr>
-                <a:solidFill>
-                  <a:srgbClr val="20794D"/>
-                </a:solidFill>
-                <a:latin typeface="Courier"/>
-              </a:rPr>
-              <a:t>"sunny"</a:t>
-            </a:r>
-            <a:r>
-              <a:rPr>
-                <a:solidFill>
-                  <a:srgbClr val="003B4F"/>
-                </a:solidFill>
-                <a:latin typeface="Courier"/>
-              </a:rPr>
-              <a:t> = </a:t>
-            </a:r>
-            <a:r>
-              <a:rPr>
-                <a:solidFill>
-                  <a:srgbClr val="20794D"/>
-                </a:solidFill>
-                <a:latin typeface="Courier"/>
-              </a:rPr>
-              <a:t>"goldenrod"</a:t>
-            </a:r>
-            <a:r>
-              <a:rPr>
-                <a:solidFill>
-                  <a:srgbClr val="003B4F"/>
-                </a:solidFill>
-                <a:latin typeface="Courier"/>
-              </a:rPr>
-              <a:t>,</a:t>
-            </a:r>
-            <a:br/>
-            <a:r>
-              <a:rPr>
-                <a:solidFill>
-                  <a:srgbClr val="003B4F"/>
-                </a:solidFill>
-                <a:latin typeface="Courier"/>
-              </a:rPr>
-              <a:t>                                </a:t>
-            </a:r>
-            <a:r>
-              <a:rPr>
-                <a:solidFill>
-                  <a:srgbClr val="20794D"/>
-                </a:solidFill>
-                <a:latin typeface="Courier"/>
-              </a:rPr>
-              <a:t>"shady"</a:t>
-            </a:r>
-            <a:r>
-              <a:rPr>
-                <a:solidFill>
-                  <a:srgbClr val="003B4F"/>
-                </a:solidFill>
-                <a:latin typeface="Courier"/>
-              </a:rPr>
-              <a:t> = </a:t>
-            </a:r>
-            <a:r>
-              <a:rPr>
-                <a:solidFill>
-                  <a:srgbClr val="20794D"/>
-                </a:solidFill>
-                <a:latin typeface="Courier"/>
-              </a:rPr>
-              <a:t>"forestgreen"</a:t>
-            </a:r>
-            <a:r>
-              <a:rPr>
-                <a:solidFill>
-                  <a:srgbClr val="003B4F"/>
-                </a:solidFill>
-                <a:latin typeface="Courier"/>
-              </a:rPr>
-              <a:t>)) </a:t>
-            </a:r>
-            <a:r>
-              <a:rPr>
-                <a:solidFill>
-                  <a:srgbClr val="5E5E5E"/>
-                </a:solidFill>
-                <a:latin typeface="Courier"/>
-              </a:rPr>
-              <a:t>+</a:t>
-            </a:r>
-            <a:br/>
-            <a:r>
-              <a:rPr>
-                <a:solidFill>
-                  <a:srgbClr val="003B4F"/>
-                </a:solidFill>
-                <a:latin typeface="Courier"/>
-              </a:rPr>
-              <a:t>  </a:t>
-            </a:r>
-            <a:r>
-              <a:rPr>
-                <a:solidFill>
-                  <a:srgbClr val="4758AB"/>
-                </a:solidFill>
-                <a:latin typeface="Courier"/>
-              </a:rPr>
-              <a:t>labs</a:t>
-            </a:r>
-            <a:r>
-              <a:rPr>
-                <a:solidFill>
-                  <a:srgbClr val="003B4F"/>
-                </a:solidFill>
-                <a:latin typeface="Courier"/>
-              </a:rPr>
-              <a:t>(</a:t>
-            </a:r>
-            <a:r>
-              <a:rPr>
-                <a:solidFill>
-                  <a:srgbClr val="657422"/>
-                </a:solidFill>
-                <a:latin typeface="Courier"/>
-              </a:rPr>
-              <a:t>x =</a:t>
-            </a:r>
-            <a:r>
-              <a:rPr>
-                <a:solidFill>
-                  <a:srgbClr val="003B4F"/>
-                </a:solidFill>
-                <a:latin typeface="Courier"/>
-              </a:rPr>
-              <a:t> </a:t>
-            </a:r>
-            <a:r>
-              <a:rPr>
-                <a:solidFill>
-                  <a:srgbClr val="20794D"/>
-                </a:solidFill>
-                <a:latin typeface="Courier"/>
-              </a:rPr>
-              <a:t>"Side of tree"</a:t>
-            </a:r>
-            <a:r>
-              <a:rPr>
-                <a:solidFill>
-                  <a:srgbClr val="003B4F"/>
-                </a:solidFill>
-                <a:latin typeface="Courier"/>
-              </a:rPr>
-              <a:t>, </a:t>
-            </a:r>
-            <a:r>
-              <a:rPr>
-                <a:solidFill>
-                  <a:srgbClr val="657422"/>
-                </a:solidFill>
-                <a:latin typeface="Courier"/>
-              </a:rPr>
-              <a:t>y =</a:t>
-            </a:r>
-            <a:r>
-              <a:rPr>
-                <a:solidFill>
-                  <a:srgbClr val="003B4F"/>
-                </a:solidFill>
-                <a:latin typeface="Courier"/>
-              </a:rPr>
-              <a:t> </a:t>
-            </a:r>
-            <a:r>
-              <a:rPr>
-                <a:solidFill>
-                  <a:srgbClr val="20794D"/>
-                </a:solidFill>
-                <a:latin typeface="Courier"/>
-              </a:rPr>
-              <a:t>"Leaf mass (g)"</a:t>
-            </a:r>
-            <a:r>
-              <a:rPr>
-                <a:solidFill>
-                  <a:srgbClr val="003B4F"/>
-                </a:solidFill>
-                <a:latin typeface="Courier"/>
-              </a:rPr>
-              <a:t>) </a:t>
-            </a:r>
-            <a:r>
-              <a:rPr>
-                <a:solidFill>
-                  <a:srgbClr val="5E5E5E"/>
-                </a:solidFill>
-                <a:latin typeface="Courier"/>
-              </a:rPr>
-              <a:t>+</a:t>
-            </a:r>
-            <a:br/>
-            <a:r>
-              <a:rPr>
-                <a:solidFill>
-                  <a:srgbClr val="003B4F"/>
-                </a:solidFill>
-                <a:latin typeface="Courier"/>
-              </a:rPr>
-              <a:t>  </a:t>
-            </a:r>
-            <a:r>
-              <a:rPr>
-                <a:solidFill>
-                  <a:srgbClr val="4758AB"/>
-                </a:solidFill>
-                <a:latin typeface="Courier"/>
-              </a:rPr>
-              <a:t>theme_regular</a:t>
-            </a:r>
-            <a:r>
-              <a:rPr>
-                <a:solidFill>
-                  <a:srgbClr val="003B4F"/>
-                </a:solidFill>
-                <a:latin typeface="Courier"/>
-              </a:rPr>
-              <a:t>() </a:t>
-            </a:r>
-            <a:r>
-              <a:rPr>
-                <a:solidFill>
-                  <a:srgbClr val="5E5E5E"/>
-                </a:solidFill>
-                <a:latin typeface="Courier"/>
-              </a:rPr>
-              <a:t>+</a:t>
-            </a:r>
-            <a:br/>
-            <a:r>
-              <a:rPr>
-                <a:solidFill>
-                  <a:srgbClr val="003B4F"/>
-                </a:solidFill>
-                <a:latin typeface="Courier"/>
-              </a:rPr>
-              <a:t>  </a:t>
-            </a:r>
-            <a:r>
-              <a:rPr>
-                <a:solidFill>
-                  <a:srgbClr val="4758AB"/>
-                </a:solidFill>
-                <a:latin typeface="Courier"/>
-              </a:rPr>
-              <a:t>theme</a:t>
-            </a:r>
-            <a:r>
-              <a:rPr>
-                <a:solidFill>
-                  <a:srgbClr val="003B4F"/>
-                </a:solidFill>
-                <a:latin typeface="Courier"/>
-              </a:rPr>
-              <a:t>(</a:t>
-            </a:r>
-            <a:r>
-              <a:rPr>
-                <a:solidFill>
-                  <a:srgbClr val="657422"/>
-                </a:solidFill>
-                <a:latin typeface="Courier"/>
-              </a:rPr>
-              <a:t>legend.position =</a:t>
-            </a:r>
-            <a:r>
-              <a:rPr>
-                <a:solidFill>
-                  <a:srgbClr val="003B4F"/>
-                </a:solidFill>
-                <a:latin typeface="Courier"/>
-              </a:rPr>
-              <a:t> </a:t>
-            </a:r>
-            <a:r>
-              <a:rPr>
-                <a:solidFill>
-                  <a:srgbClr val="20794D"/>
-                </a:solidFill>
-                <a:latin typeface="Courier"/>
-              </a:rPr>
-              <a:t>"none"</a:t>
             </a:r>
             <a:r>
               <a:rPr>
@@ -9407,8 +8626,8 @@
         </p:blipFill>
         <p:spPr bwMode="auto">
           <a:xfrm>
-            <a:off x="596900" y="1270000"/>
-            <a:ext cx="3492500" cy="2794000"/>
+            <a:off x="3606800" y="2819400"/>
+            <a:ext cx="1790700" cy="1435100"/>
           </a:xfrm>
           <a:prstGeom prst="rect">
             <a:avLst/>
@@ -9431,8 +8650,8 @@
         </p:nvSpPr>
         <p:spPr>
           <a:xfrm>
-            <a:off x="127000" y="4064000"/>
-            <a:ext cx="4432300" cy="508000"/>
+            <a:off x="127000" y="4254500"/>
+            <a:ext cx="8750300" cy="508000"/>
           </a:xfrm>
           <a:prstGeom prst="rect">
             <a:avLst/>
@@ -9448,45 +8667,7 @@
             </a:pPr>
             <a:r>
               <a:rPr/>
-              <a:t>Figure 2: Mean leaf mass (± 1 SE) by side of the tree.</a:t>
-            </a:r>
-          </a:p>
-        </p:txBody>
-      </p:sp>
-      <p:sp>
-        <p:nvSpPr>
-          <p:cNvPr id="5" name="Text Placeholder 4"/>
-          <p:cNvSpPr>
-            <a:spLocks noGrp="1"/>
-          </p:cNvSpPr>
-          <p:nvPr>
-            <p:ph idx="3" sz="quarter" type="body"/>
-          </p:nvPr>
-        </p:nvSpPr>
-        <p:spPr/>
-        <p:txBody>
-          <a:bodyPr/>
-          <a:lstStyle/>
-          <a:p>
-            <a:pPr lvl="0" indent="0" marL="1270000">
-              <a:buNone/>
-            </a:pPr>
-            <a:r>
-              <a:rPr sz="2000" b="1"/>
-              <a:t>Note</a:t>
-            </a:r>
-          </a:p>
-          <a:p>
-            <a:pPr lvl="0" indent="0" marL="1270000">
-              <a:buNone/>
-            </a:pPr>
-            <a:r>
-              <a:rPr sz="2000" b="1"/>
-              <a:t>🔮 Predict:</a:t>
-            </a:r>
-            <a:r>
-              <a:rPr sz="2000"/>
-              <a:t> The error bars overlap almost completely. Keep that picture in mind — it predicts the t-test at the end.</a:t>
+              <a:t>Figure 2: Mean leaf mass (± 1 SE) by side.</a:t>
             </a:r>
           </a:p>
         </p:txBody>
@@ -9497,6 +8678,90 @@
 </file>
 
 <file path=ppt/slides/slide25.xml><?xml version="1.0" encoding="utf-8"?>
+<p:sld xmlns:a="http://schemas.openxmlformats.org/drawingml/2006/main" xmlns:r="http://schemas.openxmlformats.org/officeDocument/2006/relationships" xmlns:p="http://schemas.openxmlformats.org/presentationml/2006/main">
+  <p:cSld>
+    <p:spTree>
+      <p:nvGrpSpPr>
+        <p:cNvPr id="1" name=""/>
+        <p:cNvGrpSpPr/>
+        <p:nvPr/>
+      </p:nvGrpSpPr>
+      <p:grpSpPr>
+        <a:xfrm>
+          <a:off x="0" y="0"/>
+          <a:ext cx="0" cy="0"/>
+          <a:chOff x="0" y="0"/>
+          <a:chExt cx="0" cy="0"/>
+        </a:xfrm>
+      </p:grpSpPr>
+      <p:sp>
+        <p:nvSpPr>
+          <p:cNvPr id="3" name="Content Placeholder 2"/>
+          <p:cNvSpPr>
+            <a:spLocks noGrp="1"/>
+          </p:cNvSpPr>
+          <p:nvPr>
+            <p:ph idx="1"/>
+          </p:nvPr>
+        </p:nvSpPr>
+        <p:spPr/>
+        <p:txBody>
+          <a:bodyPr/>
+          <a:lstStyle/>
+          <a:p>
+            <a:pPr lvl="0"/>
+            <a:r>
+              <a:rPr/>
+              <a:t>🔮 </a:t>
+            </a:r>
+            <a:r>
+              <a:rPr b="1"/>
+              <a:t>Predict:</a:t>
+            </a:r>
+            <a:r>
+              <a:rPr/>
+              <a:t> the error bars overlap almost completely — what will the t-test say?</a:t>
+            </a:r>
+          </a:p>
+          <a:p>
+            <a:pPr lvl="0"/>
+            <a:r>
+              <a:rPr/>
+              <a:t>✏️ </a:t>
+            </a:r>
+            <a:r>
+              <a:rPr b="1"/>
+              <a:t>You add:</a:t>
+            </a:r>
+            <a:r>
+              <a:rPr/>
+              <a:t> the same four finishing lines — but this plot maps </a:t>
+            </a:r>
+            <a:r>
+              <a:rPr>
+                <a:latin typeface="Courier"/>
+              </a:rPr>
+              <a:t>color</a:t>
+            </a:r>
+            <a:r>
+              <a:rPr/>
+              <a:t>, not </a:t>
+            </a:r>
+            <a:r>
+              <a:rPr>
+                <a:latin typeface="Courier"/>
+              </a:rPr>
+              <a:t>fill</a:t>
+            </a:r>
+          </a:p>
+        </p:txBody>
+      </p:sp>
+    </p:spTree>
+  </p:cSld>
+</p:sld>
+</file>
+
+<file path=ppt/slides/slide26.xml><?xml version="1.0" encoding="utf-8"?>
 <p:sld xmlns:a="http://schemas.openxmlformats.org/drawingml/2006/main" xmlns:r="http://schemas.openxmlformats.org/officeDocument/2006/relationships" xmlns:p="http://schemas.openxmlformats.org/presentationml/2006/main">
   <p:cSld>
     <p:spTree>
@@ -9525,8 +8790,8 @@
         </p:nvSpPr>
         <p:spPr>
           <a:xfrm>
-            <a:off x="139485" y="78119"/>
-            <a:ext cx="8229600" cy="607682"/>
+            <a:off x="0" y="0"/>
+            <a:ext cx="9144000" cy="871538"/>
           </a:xfrm>
         </p:spPr>
         <p:txBody>
@@ -9545,12 +8810,12 @@
       </p:sp>
       <p:sp>
         <p:nvSpPr>
-          <p:cNvPr id="3" name="Text Placeholder 2"/>
+          <p:cNvPr id="4" name="Text Placeholder 3"/>
           <p:cNvSpPr>
             <a:spLocks noGrp="1"/>
           </p:cNvSpPr>
           <p:nvPr>
-            <p:ph idx="1" type="body"/>
+            <p:ph idx="2" sz="half" type="body"/>
           </p:nvPr>
         </p:nvSpPr>
         <p:spPr/>
@@ -9588,7 +8853,7 @@
                 </a:solidFill>
                 <a:latin typeface="Courier"/>
               </a:rPr>
-              <a:t>#| fig-cap: "Distribution of leaf mass on each side of the tree."</a:t>
+              <a:t>#| output-location: column</a:t>
             </a:r>
             <a:br/>
             <a:r>
@@ -9598,6 +8863,16 @@
                 </a:solidFill>
                 <a:latin typeface="Courier"/>
               </a:rPr>
+              <a:t>#| fig-cap: "Distribution of leaf mass on each side."</a:t>
+            </a:r>
+            <a:br/>
+            <a:r>
+              <a:rPr>
+                <a:solidFill>
+                  <a:srgbClr val="5E5E5E"/>
+                </a:solidFill>
+                <a:latin typeface="Courier"/>
+              </a:rPr>
               <a:t>#| fig-width: 6</a:t>
             </a:r>
             <a:br/>
@@ -9883,381 +9158,7 @@
                 </a:solidFill>
                 <a:latin typeface="Courier"/>
               </a:rPr>
-              <a:t>shade) </a:t>
-            </a:r>
-            <a:r>
-              <a:rPr>
-                <a:solidFill>
-                  <a:srgbClr val="5E5E5E"/>
-                </a:solidFill>
-                <a:latin typeface="Courier"/>
-              </a:rPr>
-              <a:t>+</a:t>
-            </a:r>
-            <a:br/>
-            <a:r>
-              <a:rPr>
-                <a:solidFill>
-                  <a:srgbClr val="003B4F"/>
-                </a:solidFill>
-                <a:latin typeface="Courier"/>
-              </a:rPr>
-              <a:t>  </a:t>
-            </a:r>
-            <a:r>
-              <a:rPr>
-                <a:solidFill>
-                  <a:srgbClr val="4758AB"/>
-                </a:solidFill>
-                <a:latin typeface="Courier"/>
-              </a:rPr>
-              <a:t>scale_fill_manual</a:t>
-            </a:r>
-            <a:r>
-              <a:rPr>
-                <a:solidFill>
-                  <a:srgbClr val="003B4F"/>
-                </a:solidFill>
-                <a:latin typeface="Courier"/>
-              </a:rPr>
-              <a:t>(</a:t>
-            </a:r>
-            <a:r>
-              <a:rPr>
-                <a:solidFill>
-                  <a:srgbClr val="657422"/>
-                </a:solidFill>
-                <a:latin typeface="Courier"/>
-              </a:rPr>
-              <a:t>values =</a:t>
-            </a:r>
-            <a:r>
-              <a:rPr>
-                <a:solidFill>
-                  <a:srgbClr val="003B4F"/>
-                </a:solidFill>
-                <a:latin typeface="Courier"/>
-              </a:rPr>
-              <a:t> </a:t>
-            </a:r>
-            <a:r>
-              <a:rPr>
-                <a:solidFill>
-                  <a:srgbClr val="4758AB"/>
-                </a:solidFill>
-                <a:latin typeface="Courier"/>
-              </a:rPr>
-              <a:t>c</a:t>
-            </a:r>
-            <a:r>
-              <a:rPr>
-                <a:solidFill>
-                  <a:srgbClr val="003B4F"/>
-                </a:solidFill>
-                <a:latin typeface="Courier"/>
-              </a:rPr>
-              <a:t>(</a:t>
-            </a:r>
-            <a:r>
-              <a:rPr>
-                <a:solidFill>
-                  <a:srgbClr val="20794D"/>
-                </a:solidFill>
-                <a:latin typeface="Courier"/>
-              </a:rPr>
-              <a:t>"sunny"</a:t>
-            </a:r>
-            <a:r>
-              <a:rPr>
-                <a:solidFill>
-                  <a:srgbClr val="003B4F"/>
-                </a:solidFill>
-                <a:latin typeface="Courier"/>
-              </a:rPr>
-              <a:t> = </a:t>
-            </a:r>
-            <a:r>
-              <a:rPr>
-                <a:solidFill>
-                  <a:srgbClr val="20794D"/>
-                </a:solidFill>
-                <a:latin typeface="Courier"/>
-              </a:rPr>
-              <a:t>"goldenrod"</a:t>
-            </a:r>
-            <a:r>
-              <a:rPr>
-                <a:solidFill>
-                  <a:srgbClr val="003B4F"/>
-                </a:solidFill>
-                <a:latin typeface="Courier"/>
-              </a:rPr>
-              <a:t>,</a:t>
-            </a:r>
-            <a:br/>
-            <a:r>
-              <a:rPr>
-                <a:solidFill>
-                  <a:srgbClr val="003B4F"/>
-                </a:solidFill>
-                <a:latin typeface="Courier"/>
-              </a:rPr>
-              <a:t>                               </a:t>
-            </a:r>
-            <a:r>
-              <a:rPr>
-                <a:solidFill>
-                  <a:srgbClr val="20794D"/>
-                </a:solidFill>
-                <a:latin typeface="Courier"/>
-              </a:rPr>
-              <a:t>"shady"</a:t>
-            </a:r>
-            <a:r>
-              <a:rPr>
-                <a:solidFill>
-                  <a:srgbClr val="003B4F"/>
-                </a:solidFill>
-                <a:latin typeface="Courier"/>
-              </a:rPr>
-              <a:t> = </a:t>
-            </a:r>
-            <a:r>
-              <a:rPr>
-                <a:solidFill>
-                  <a:srgbClr val="20794D"/>
-                </a:solidFill>
-                <a:latin typeface="Courier"/>
-              </a:rPr>
-              <a:t>"forestgreen"</a:t>
-            </a:r>
-            <a:r>
-              <a:rPr>
-                <a:solidFill>
-                  <a:srgbClr val="003B4F"/>
-                </a:solidFill>
-                <a:latin typeface="Courier"/>
-              </a:rPr>
-              <a:t>)) </a:t>
-            </a:r>
-            <a:r>
-              <a:rPr>
-                <a:solidFill>
-                  <a:srgbClr val="5E5E5E"/>
-                </a:solidFill>
-                <a:latin typeface="Courier"/>
-              </a:rPr>
-              <a:t>+</a:t>
-            </a:r>
-            <a:br/>
-            <a:r>
-              <a:rPr>
-                <a:solidFill>
-                  <a:srgbClr val="003B4F"/>
-                </a:solidFill>
-                <a:latin typeface="Courier"/>
-              </a:rPr>
-              <a:t>  </a:t>
-            </a:r>
-            <a:r>
-              <a:rPr>
-                <a:solidFill>
-                  <a:srgbClr val="4758AB"/>
-                </a:solidFill>
-                <a:latin typeface="Courier"/>
-              </a:rPr>
-              <a:t>labs</a:t>
-            </a:r>
-            <a:r>
-              <a:rPr>
-                <a:solidFill>
-                  <a:srgbClr val="003B4F"/>
-                </a:solidFill>
-                <a:latin typeface="Courier"/>
-              </a:rPr>
-              <a:t>(</a:t>
-            </a:r>
-            <a:r>
-              <a:rPr>
-                <a:solidFill>
-                  <a:srgbClr val="657422"/>
-                </a:solidFill>
-                <a:latin typeface="Courier"/>
-              </a:rPr>
-              <a:t>x =</a:t>
-            </a:r>
-            <a:r>
-              <a:rPr>
-                <a:solidFill>
-                  <a:srgbClr val="003B4F"/>
-                </a:solidFill>
-                <a:latin typeface="Courier"/>
-              </a:rPr>
-              <a:t> </a:t>
-            </a:r>
-            <a:r>
-              <a:rPr>
-                <a:solidFill>
-                  <a:srgbClr val="20794D"/>
-                </a:solidFill>
-                <a:latin typeface="Courier"/>
-              </a:rPr>
-              <a:t>"Leaf mass (g)"</a:t>
-            </a:r>
-            <a:r>
-              <a:rPr>
-                <a:solidFill>
-                  <a:srgbClr val="003B4F"/>
-                </a:solidFill>
-                <a:latin typeface="Courier"/>
-              </a:rPr>
-              <a:t>, </a:t>
-            </a:r>
-            <a:r>
-              <a:rPr>
-                <a:solidFill>
-                  <a:srgbClr val="657422"/>
-                </a:solidFill>
-                <a:latin typeface="Courier"/>
-              </a:rPr>
-              <a:t>y =</a:t>
-            </a:r>
-            <a:r>
-              <a:rPr>
-                <a:solidFill>
-                  <a:srgbClr val="003B4F"/>
-                </a:solidFill>
-                <a:latin typeface="Courier"/>
-              </a:rPr>
-              <a:t> </a:t>
-            </a:r>
-            <a:r>
-              <a:rPr>
-                <a:solidFill>
-                  <a:srgbClr val="20794D"/>
-                </a:solidFill>
-                <a:latin typeface="Courier"/>
-              </a:rPr>
-              <a:t>"Count"</a:t>
-            </a:r>
-            <a:r>
-              <a:rPr>
-                <a:solidFill>
-                  <a:srgbClr val="003B4F"/>
-                </a:solidFill>
-                <a:latin typeface="Courier"/>
-              </a:rPr>
-              <a:t>) </a:t>
-            </a:r>
-            <a:r>
-              <a:rPr>
-                <a:solidFill>
-                  <a:srgbClr val="5E5E5E"/>
-                </a:solidFill>
-                <a:latin typeface="Courier"/>
-              </a:rPr>
-              <a:t>+</a:t>
-            </a:r>
-            <a:br/>
-            <a:r>
-              <a:rPr>
-                <a:solidFill>
-                  <a:srgbClr val="003B4F"/>
-                </a:solidFill>
-                <a:latin typeface="Courier"/>
-              </a:rPr>
-              <a:t>  </a:t>
-            </a:r>
-            <a:r>
-              <a:rPr>
-                <a:solidFill>
-                  <a:srgbClr val="4758AB"/>
-                </a:solidFill>
-                <a:latin typeface="Courier"/>
-              </a:rPr>
-              <a:t>theme_regular</a:t>
-            </a:r>
-            <a:r>
-              <a:rPr>
-                <a:solidFill>
-                  <a:srgbClr val="003B4F"/>
-                </a:solidFill>
-                <a:latin typeface="Courier"/>
-              </a:rPr>
-              <a:t>() </a:t>
-            </a:r>
-            <a:r>
-              <a:rPr>
-                <a:solidFill>
-                  <a:srgbClr val="5E5E5E"/>
-                </a:solidFill>
-                <a:latin typeface="Courier"/>
-              </a:rPr>
-              <a:t>+</a:t>
-            </a:r>
-            <a:br/>
-            <a:r>
-              <a:rPr>
-                <a:solidFill>
-                  <a:srgbClr val="003B4F"/>
-                </a:solidFill>
-                <a:latin typeface="Courier"/>
-              </a:rPr>
-              <a:t>  </a:t>
-            </a:r>
-            <a:r>
-              <a:rPr>
-                <a:solidFill>
-                  <a:srgbClr val="4758AB"/>
-                </a:solidFill>
-                <a:latin typeface="Courier"/>
-              </a:rPr>
-              <a:t>theme</a:t>
-            </a:r>
-            <a:r>
-              <a:rPr>
-                <a:solidFill>
-                  <a:srgbClr val="003B4F"/>
-                </a:solidFill>
-                <a:latin typeface="Courier"/>
-              </a:rPr>
-              <a:t>(</a:t>
-            </a:r>
-            <a:r>
-              <a:rPr>
-                <a:solidFill>
-                  <a:srgbClr val="657422"/>
-                </a:solidFill>
-                <a:latin typeface="Courier"/>
-              </a:rPr>
-              <a:t>legend.position =</a:t>
-            </a:r>
-            <a:r>
-              <a:rPr>
-                <a:solidFill>
-                  <a:srgbClr val="003B4F"/>
-                </a:solidFill>
-                <a:latin typeface="Courier"/>
-              </a:rPr>
-              <a:t> </a:t>
-            </a:r>
-            <a:r>
-              <a:rPr>
-                <a:solidFill>
-                  <a:srgbClr val="20794D"/>
-                </a:solidFill>
-                <a:latin typeface="Courier"/>
-              </a:rPr>
-              <a:t>"none"</a:t>
-            </a:r>
-            <a:r>
-              <a:rPr>
-                <a:solidFill>
-                  <a:srgbClr val="003B4F"/>
-                </a:solidFill>
-                <a:latin typeface="Courier"/>
-              </a:rPr>
-              <a:t>)</a:t>
+              <a:t>shade)</a:t>
             </a:r>
             <a:br/>
             <a:r>
@@ -10288,8 +9189,8 @@
         </p:blipFill>
         <p:spPr bwMode="auto">
           <a:xfrm>
-            <a:off x="127000" y="1371600"/>
-            <a:ext cx="4432300" cy="2590800"/>
+            <a:off x="3276600" y="2819400"/>
+            <a:ext cx="2463800" cy="1435100"/>
           </a:xfrm>
           <a:prstGeom prst="rect">
             <a:avLst/>
@@ -10312,8 +9213,8 @@
         </p:nvSpPr>
         <p:spPr>
           <a:xfrm>
-            <a:off x="127000" y="4064000"/>
-            <a:ext cx="4432300" cy="508000"/>
+            <a:off x="127000" y="4254500"/>
+            <a:ext cx="8750300" cy="508000"/>
           </a:xfrm>
           <a:prstGeom prst="rect">
             <a:avLst/>
@@ -10329,51 +9230,7 @@
             </a:pPr>
             <a:r>
               <a:rPr/>
-              <a:t>Figure 3: Distribution of leaf mass on each side of the tree.</a:t>
-            </a:r>
-          </a:p>
-        </p:txBody>
-      </p:sp>
-      <p:sp>
-        <p:nvSpPr>
-          <p:cNvPr id="5" name="Text Placeholder 4"/>
-          <p:cNvSpPr>
-            <a:spLocks noGrp="1"/>
-          </p:cNvSpPr>
-          <p:nvPr>
-            <p:ph idx="3" sz="quarter" type="body"/>
-          </p:nvPr>
-        </p:nvSpPr>
-        <p:spPr/>
-        <p:txBody>
-          <a:bodyPr/>
-          <a:lstStyle/>
-          <a:p>
-            <a:pPr lvl="0"/>
-            <a:r>
-              <a:rPr/>
-              <a:t>Wider and shorter (</a:t>
-            </a:r>
-            <a:r>
-              <a:rPr>
-                <a:latin typeface="Courier"/>
-              </a:rPr>
-              <a:t>6 × 3.5</a:t>
-            </a:r>
-            <a:r>
-              <a:rPr/>
-              <a:t>) because it has </a:t>
-            </a:r>
-            <a:r>
-              <a:rPr b="1"/>
-              <a:t>two panels</a:t>
-            </a:r>
-          </a:p>
-          <a:p>
-            <a:pPr lvl="0"/>
-            <a:r>
-              <a:rPr/>
-              <a:t>The box plot hides the shape; the histogram shows it</a:t>
+              <a:t>Figure 3: Distribution of leaf mass on each side.</a:t>
             </a:r>
           </a:p>
         </p:txBody>
@@ -10383,7 +9240,108 @@
 </p:sld>
 </file>
 
-<file path=ppt/slides/slide26.xml><?xml version="1.0" encoding="utf-8"?>
+<file path=ppt/slides/slide27.xml><?xml version="1.0" encoding="utf-8"?>
+<p:sld xmlns:a="http://schemas.openxmlformats.org/drawingml/2006/main" xmlns:r="http://schemas.openxmlformats.org/officeDocument/2006/relationships" xmlns:p="http://schemas.openxmlformats.org/presentationml/2006/main">
+  <p:cSld>
+    <p:spTree>
+      <p:nvGrpSpPr>
+        <p:cNvPr id="1" name=""/>
+        <p:cNvGrpSpPr/>
+        <p:nvPr/>
+      </p:nvGrpSpPr>
+      <p:grpSpPr>
+        <a:xfrm>
+          <a:off x="0" y="0"/>
+          <a:ext cx="0" cy="0"/>
+          <a:chOff x="0" y="0"/>
+          <a:chExt cx="0" cy="0"/>
+        </a:xfrm>
+      </p:grpSpPr>
+      <p:sp>
+        <p:nvSpPr>
+          <p:cNvPr id="3" name="Content Placeholder 2"/>
+          <p:cNvSpPr>
+            <a:spLocks noGrp="1"/>
+          </p:cNvSpPr>
+          <p:nvPr>
+            <p:ph idx="1"/>
+          </p:nvPr>
+        </p:nvSpPr>
+        <p:spPr/>
+        <p:txBody>
+          <a:bodyPr/>
+          <a:lstStyle/>
+          <a:p>
+            <a:pPr lvl="0"/>
+            <a:r>
+              <a:rPr/>
+              <a:t>Wider and shorter (</a:t>
+            </a:r>
+            <a:r>
+              <a:rPr>
+                <a:latin typeface="Courier"/>
+              </a:rPr>
+              <a:t>6 × 3.5</a:t>
+            </a:r>
+            <a:r>
+              <a:rPr/>
+              <a:t>) because it has </a:t>
+            </a:r>
+            <a:r>
+              <a:rPr b="1"/>
+              <a:t>two panels</a:t>
+            </a:r>
+          </a:p>
+          <a:p>
+            <a:pPr lvl="0"/>
+            <a:r>
+              <a:rPr/>
+              <a:t>The box plot hides the shape; the histogram shows it</a:t>
+            </a:r>
+          </a:p>
+          <a:p>
+            <a:pPr lvl="0"/>
+            <a:r>
+              <a:rPr/>
+              <a:t>✏️ </a:t>
+            </a:r>
+            <a:r>
+              <a:rPr b="1"/>
+              <a:t>You add:</a:t>
+            </a:r>
+            <a:r>
+              <a:rPr/>
+              <a:t> colors, </a:t>
+            </a:r>
+            <a:r>
+              <a:rPr>
+                <a:latin typeface="Courier"/>
+              </a:rPr>
+              <a:t>labs()</a:t>
+            </a:r>
+            <a:r>
+              <a:rPr/>
+              <a:t>, </a:t>
+            </a:r>
+            <a:r>
+              <a:rPr>
+                <a:latin typeface="Courier"/>
+              </a:rPr>
+              <a:t>theme_regular()</a:t>
+            </a:r>
+            <a:r>
+              <a:rPr/>
+              <a:t>, no legend</a:t>
+            </a:r>
+          </a:p>
+        </p:txBody>
+      </p:sp>
+    </p:spTree>
+  </p:cSld>
+</p:sld>
+</file>
+
+<file path=ppt/slides/slide28.xml><?xml version="1.0" encoding="utf-8"?>
 <p:sld xmlns:a="http://schemas.openxmlformats.org/drawingml/2006/main" xmlns:r="http://schemas.openxmlformats.org/officeDocument/2006/relationships" xmlns:p="http://schemas.openxmlformats.org/presentationml/2006/main">
   <p:cSld>
     <p:spTree>
@@ -11426,7 +10384,7 @@
 </p:sld>
 </file>
 
-<file path=ppt/slides/slide27.xml><?xml version="1.0" encoding="utf-8"?>
+<file path=ppt/slides/slide29.xml><?xml version="1.0" encoding="utf-8"?>
 <p:sld xmlns:a="http://schemas.openxmlformats.org/drawingml/2006/main" xmlns:r="http://schemas.openxmlformats.org/officeDocument/2006/relationships" xmlns:p="http://schemas.openxmlformats.org/presentationml/2006/main">
   <p:cSld>
     <p:spTree>
@@ -11645,243 +10603,6 @@
             <a:r>
               <a:rPr sz="2000"/>
               <a:t> in Word and PDF. Same numbers, readable layout.</a:t>
-            </a:r>
-          </a:p>
-        </p:txBody>
-      </p:sp>
-    </p:spTree>
-  </p:cSld>
-</p:sld>
-</file>
-
-<file path=ppt/slides/slide28.xml><?xml version="1.0" encoding="utf-8"?>
-<p:sld xmlns:a="http://schemas.openxmlformats.org/drawingml/2006/main" xmlns:r="http://schemas.openxmlformats.org/officeDocument/2006/relationships" xmlns:p="http://schemas.openxmlformats.org/presentationml/2006/main">
-  <p:cSld>
-    <p:spTree>
-      <p:nvGrpSpPr>
-        <p:cNvPr id="1" name=""/>
-        <p:cNvGrpSpPr/>
-        <p:nvPr/>
-      </p:nvGrpSpPr>
-      <p:grpSpPr>
-        <a:xfrm>
-          <a:off x="0" y="0"/>
-          <a:ext cx="0" cy="0"/>
-          <a:chOff x="0" y="0"/>
-          <a:chExt cx="0" cy="0"/>
-        </a:xfrm>
-      </p:grpSpPr>
-      <p:sp>
-        <p:nvSpPr>
-          <p:cNvPr id="2" name="Title 1"/>
-          <p:cNvSpPr>
-            <a:spLocks noGrp="1"/>
-          </p:cNvSpPr>
-          <p:nvPr>
-            <p:ph type="title"/>
-          </p:nvPr>
-        </p:nvSpPr>
-        <p:spPr>
-          <a:xfrm>
-            <a:off x="0" y="0"/>
-            <a:ext cx="9144000" cy="582780"/>
-          </a:xfrm>
-        </p:spPr>
-        <p:txBody>
-          <a:bodyPr/>
-          <a:lstStyle/>
-          <a:p>
-            <a:pPr lvl="0" indent="0" marL="0">
-              <a:buNone/>
-            </a:pPr>
-            <a:r>
-              <a:rPr/>
-              <a:t>🛑 Pause — Do Activity Parts 5–6 Now</a:t>
-            </a:r>
-          </a:p>
-        </p:txBody>
-      </p:sp>
-      <p:sp>
-        <p:nvSpPr>
-          <p:cNvPr id="3" name="Content Placeholder 2"/>
-          <p:cNvSpPr>
-            <a:spLocks noGrp="1"/>
-          </p:cNvSpPr>
-          <p:nvPr>
-            <p:ph idx="1"/>
-          </p:nvPr>
-        </p:nvSpPr>
-        <p:spPr/>
-        <p:txBody>
-          <a:bodyPr/>
-          <a:lstStyle/>
-          <a:p>
-            <a:pPr lvl="0" indent="0" marL="0">
-              <a:buNone/>
-            </a:pPr>
-            <a:r>
-              <a:rPr b="1"/>
-              <a:t>🛑 Do Activity Parts 5–6 now</a:t>
-            </a:r>
-          </a:p>
-          <a:p>
-            <a:pPr lvl="0" indent="0" marL="0">
-              <a:buNone/>
-            </a:pPr>
-            <a:r>
-              <a:rPr/>
-              <a:t>Render the plain plots and table first, then finish them: colors, axis labels, </a:t>
-            </a:r>
-            <a:r>
-              <a:rPr>
-                <a:latin typeface="Courier"/>
-              </a:rPr>
-              <a:t>theme_regular()</a:t>
-            </a:r>
-            <a:r>
-              <a:rPr/>
-              <a:t>, no legend, and </a:t>
-            </a:r>
-            <a:r>
-              <a:rPr>
-                <a:latin typeface="Courier"/>
-              </a:rPr>
-              <a:t>digits</a:t>
-            </a:r>
-            <a:r>
-              <a:rPr/>
-              <a:t> + </a:t>
-            </a:r>
-            <a:r>
-              <a:rPr>
-                <a:latin typeface="Courier"/>
-              </a:rPr>
-              <a:t>col.names</a:t>
-            </a:r>
-            <a:r>
-              <a:rPr/>
-              <a:t> in </a:t>
-            </a:r>
-            <a:r>
-              <a:rPr>
-                <a:latin typeface="Courier"/>
-              </a:rPr>
-              <a:t>kable()</a:t>
-            </a:r>
-            <a:r>
-              <a:rPr/>
-              <a:t>. Render after </a:t>
-            </a:r>
-            <a:r>
-              <a:rPr b="1"/>
-              <a:t>each</a:t>
-            </a:r>
-            <a:r>
-              <a:rPr/>
-              <a:t> one.</a:t>
-            </a:r>
-          </a:p>
-        </p:txBody>
-      </p:sp>
-    </p:spTree>
-  </p:cSld>
-</p:sld>
-</file>
-
-<file path=ppt/slides/slide29.xml><?xml version="1.0" encoding="utf-8"?>
-<p:sld xmlns:a="http://schemas.openxmlformats.org/drawingml/2006/main" xmlns:r="http://schemas.openxmlformats.org/officeDocument/2006/relationships" xmlns:p="http://schemas.openxmlformats.org/presentationml/2006/main">
-  <p:cSld>
-    <p:spTree>
-      <p:nvGrpSpPr>
-        <p:cNvPr id="1" name=""/>
-        <p:cNvGrpSpPr/>
-        <p:nvPr/>
-      </p:nvGrpSpPr>
-      <p:grpSpPr>
-        <a:xfrm>
-          <a:off x="0" y="0"/>
-          <a:ext cx="0" cy="0"/>
-          <a:chOff x="0" y="0"/>
-          <a:chExt cx="0" cy="0"/>
-        </a:xfrm>
-      </p:grpSpPr>
-      <p:sp>
-        <p:nvSpPr>
-          <p:cNvPr id="2" name="Title 1"/>
-          <p:cNvSpPr>
-            <a:spLocks noGrp="1"/>
-          </p:cNvSpPr>
-          <p:nvPr>
-            <p:ph type="title"/>
-          </p:nvPr>
-        </p:nvSpPr>
-        <p:spPr>
-          <a:xfrm>
-            <a:off x="0" y="0"/>
-            <a:ext cx="9144000" cy="582780"/>
-          </a:xfrm>
-        </p:spPr>
-        <p:txBody>
-          <a:bodyPr/>
-          <a:lstStyle/>
-          <a:p>
-            <a:pPr lvl="0" indent="0" marL="0">
-              <a:buNone/>
-            </a:pPr>
-            <a:r>
-              <a:rPr/>
-              <a:t>🧩 Chunk 4 of 4 · Test It, Then Render Everything</a:t>
-            </a:r>
-          </a:p>
-        </p:txBody>
-      </p:sp>
-      <p:sp>
-        <p:nvSpPr>
-          <p:cNvPr id="3" name="Content Placeholder 2"/>
-          <p:cNvSpPr>
-            <a:spLocks noGrp="1"/>
-          </p:cNvSpPr>
-          <p:nvPr>
-            <p:ph idx="1"/>
-          </p:nvPr>
-        </p:nvSpPr>
-        <p:spPr/>
-        <p:txBody>
-          <a:bodyPr/>
-          <a:lstStyle/>
-          <a:p>
-            <a:pPr lvl="0" indent="0" marL="0">
-              <a:buNone/>
-            </a:pPr>
-            <a:r>
-              <a:rPr b="1"/>
-              <a:t>We will cover:</a:t>
-            </a:r>
-            <a:r>
-              <a:rPr/>
-              <a:t> a Welch’s two-sample t-test (you met the t-test in intro bio), a clean results table, then hiding the code and rendering Word, PDF, and slides.</a:t>
-            </a:r>
-          </a:p>
-          <a:p>
-            <a:pPr lvl="0" indent="0" marL="1270000">
-              <a:buNone/>
-            </a:pPr>
-            <a:r>
-              <a:rPr sz="2000" b="1"/>
-              <a:t>Tip</a:t>
-            </a:r>
-          </a:p>
-          <a:p>
-            <a:pPr lvl="0" indent="0" marL="1270000">
-              <a:buNone/>
-            </a:pPr>
-            <a:r>
-              <a:rPr sz="2000" b="1"/>
-              <a:t>🖐 After this chunk: Activity Parts 7–9</a:t>
-            </a:r>
-            <a:r>
-              <a:rPr sz="2000"/>
-              <a:t> (t-test, render all three and hand in, then play).</a:t>
             </a:r>
           </a:p>
         </p:txBody>
@@ -12277,6 +10998,243 @@
         <p:spPr>
           <a:xfrm>
             <a:off x="0" y="0"/>
+            <a:ext cx="9144000" cy="582780"/>
+          </a:xfrm>
+        </p:spPr>
+        <p:txBody>
+          <a:bodyPr/>
+          <a:lstStyle/>
+          <a:p>
+            <a:pPr lvl="0" indent="0" marL="0">
+              <a:buNone/>
+            </a:pPr>
+            <a:r>
+              <a:rPr/>
+              <a:t>🛑 Pause — Do Activity Parts 5–6 Now</a:t>
+            </a:r>
+          </a:p>
+        </p:txBody>
+      </p:sp>
+      <p:sp>
+        <p:nvSpPr>
+          <p:cNvPr id="3" name="Content Placeholder 2"/>
+          <p:cNvSpPr>
+            <a:spLocks noGrp="1"/>
+          </p:cNvSpPr>
+          <p:nvPr>
+            <p:ph idx="1"/>
+          </p:nvPr>
+        </p:nvSpPr>
+        <p:spPr/>
+        <p:txBody>
+          <a:bodyPr/>
+          <a:lstStyle/>
+          <a:p>
+            <a:pPr lvl="0" indent="0" marL="0">
+              <a:buNone/>
+            </a:pPr>
+            <a:r>
+              <a:rPr b="1"/>
+              <a:t>🛑 Do Activity Parts 5–6 now</a:t>
+            </a:r>
+          </a:p>
+          <a:p>
+            <a:pPr lvl="0" indent="0" marL="0">
+              <a:buNone/>
+            </a:pPr>
+            <a:r>
+              <a:rPr/>
+              <a:t>Render the plain plots and table first, then finish them: colors, axis labels, </a:t>
+            </a:r>
+            <a:r>
+              <a:rPr>
+                <a:latin typeface="Courier"/>
+              </a:rPr>
+              <a:t>theme_regular()</a:t>
+            </a:r>
+            <a:r>
+              <a:rPr/>
+              <a:t>, no legend, and </a:t>
+            </a:r>
+            <a:r>
+              <a:rPr>
+                <a:latin typeface="Courier"/>
+              </a:rPr>
+              <a:t>digits</a:t>
+            </a:r>
+            <a:r>
+              <a:rPr/>
+              <a:t> + </a:t>
+            </a:r>
+            <a:r>
+              <a:rPr>
+                <a:latin typeface="Courier"/>
+              </a:rPr>
+              <a:t>col.names</a:t>
+            </a:r>
+            <a:r>
+              <a:rPr/>
+              <a:t> in </a:t>
+            </a:r>
+            <a:r>
+              <a:rPr>
+                <a:latin typeface="Courier"/>
+              </a:rPr>
+              <a:t>kable()</a:t>
+            </a:r>
+            <a:r>
+              <a:rPr/>
+              <a:t>. Render after </a:t>
+            </a:r>
+            <a:r>
+              <a:rPr b="1"/>
+              <a:t>each</a:t>
+            </a:r>
+            <a:r>
+              <a:rPr/>
+              <a:t> one.</a:t>
+            </a:r>
+          </a:p>
+        </p:txBody>
+      </p:sp>
+    </p:spTree>
+  </p:cSld>
+</p:sld>
+</file>
+
+<file path=ppt/slides/slide31.xml><?xml version="1.0" encoding="utf-8"?>
+<p:sld xmlns:a="http://schemas.openxmlformats.org/drawingml/2006/main" xmlns:r="http://schemas.openxmlformats.org/officeDocument/2006/relationships" xmlns:p="http://schemas.openxmlformats.org/presentationml/2006/main">
+  <p:cSld>
+    <p:spTree>
+      <p:nvGrpSpPr>
+        <p:cNvPr id="1" name=""/>
+        <p:cNvGrpSpPr/>
+        <p:nvPr/>
+      </p:nvGrpSpPr>
+      <p:grpSpPr>
+        <a:xfrm>
+          <a:off x="0" y="0"/>
+          <a:ext cx="0" cy="0"/>
+          <a:chOff x="0" y="0"/>
+          <a:chExt cx="0" cy="0"/>
+        </a:xfrm>
+      </p:grpSpPr>
+      <p:sp>
+        <p:nvSpPr>
+          <p:cNvPr id="2" name="Title 1"/>
+          <p:cNvSpPr>
+            <a:spLocks noGrp="1"/>
+          </p:cNvSpPr>
+          <p:nvPr>
+            <p:ph type="title"/>
+          </p:nvPr>
+        </p:nvSpPr>
+        <p:spPr>
+          <a:xfrm>
+            <a:off x="0" y="0"/>
+            <a:ext cx="9144000" cy="582780"/>
+          </a:xfrm>
+        </p:spPr>
+        <p:txBody>
+          <a:bodyPr/>
+          <a:lstStyle/>
+          <a:p>
+            <a:pPr lvl="0" indent="0" marL="0">
+              <a:buNone/>
+            </a:pPr>
+            <a:r>
+              <a:rPr/>
+              <a:t>🧩 Chunk 4 of 4 · Test It, Then Render Everything</a:t>
+            </a:r>
+          </a:p>
+        </p:txBody>
+      </p:sp>
+      <p:sp>
+        <p:nvSpPr>
+          <p:cNvPr id="3" name="Content Placeholder 2"/>
+          <p:cNvSpPr>
+            <a:spLocks noGrp="1"/>
+          </p:cNvSpPr>
+          <p:nvPr>
+            <p:ph idx="1"/>
+          </p:nvPr>
+        </p:nvSpPr>
+        <p:spPr/>
+        <p:txBody>
+          <a:bodyPr/>
+          <a:lstStyle/>
+          <a:p>
+            <a:pPr lvl="0" indent="0" marL="0">
+              <a:buNone/>
+            </a:pPr>
+            <a:r>
+              <a:rPr b="1"/>
+              <a:t>We will cover:</a:t>
+            </a:r>
+            <a:r>
+              <a:rPr/>
+              <a:t> a Welch’s two-sample t-test (you met the t-test in intro bio), a clean results table, then hiding the code and rendering Word, PDF, and slides.</a:t>
+            </a:r>
+          </a:p>
+          <a:p>
+            <a:pPr lvl="0" indent="0" marL="1270000">
+              <a:buNone/>
+            </a:pPr>
+            <a:r>
+              <a:rPr sz="2000" b="1"/>
+              <a:t>Tip</a:t>
+            </a:r>
+          </a:p>
+          <a:p>
+            <a:pPr lvl="0" indent="0" marL="1270000">
+              <a:buNone/>
+            </a:pPr>
+            <a:r>
+              <a:rPr sz="2000" b="1"/>
+              <a:t>🖐 After this chunk: Activity Parts 7–9</a:t>
+            </a:r>
+            <a:r>
+              <a:rPr sz="2000"/>
+              <a:t> (t-test, render all three and hand in, then play).</a:t>
+            </a:r>
+          </a:p>
+        </p:txBody>
+      </p:sp>
+    </p:spTree>
+  </p:cSld>
+</p:sld>
+</file>
+
+<file path=ppt/slides/slide32.xml><?xml version="1.0" encoding="utf-8"?>
+<p:sld xmlns:a="http://schemas.openxmlformats.org/drawingml/2006/main" xmlns:r="http://schemas.openxmlformats.org/officeDocument/2006/relationships" xmlns:p="http://schemas.openxmlformats.org/presentationml/2006/main">
+  <p:cSld>
+    <p:spTree>
+      <p:nvGrpSpPr>
+        <p:cNvPr id="1" name=""/>
+        <p:cNvGrpSpPr/>
+        <p:nvPr/>
+      </p:nvGrpSpPr>
+      <p:grpSpPr>
+        <a:xfrm>
+          <a:off x="0" y="0"/>
+          <a:ext cx="0" cy="0"/>
+          <a:chOff x="0" y="0"/>
+          <a:chExt cx="0" cy="0"/>
+        </a:xfrm>
+      </p:grpSpPr>
+      <p:sp>
+        <p:nvSpPr>
+          <p:cNvPr id="2" name="Title 1"/>
+          <p:cNvSpPr>
+            <a:spLocks noGrp="1"/>
+          </p:cNvSpPr>
+          <p:nvPr>
+            <p:ph type="title"/>
+          </p:nvPr>
+        </p:nvSpPr>
+        <p:spPr>
+          <a:xfrm>
+            <a:off x="0" y="0"/>
             <a:ext cx="9144000" cy="602780"/>
           </a:xfrm>
           <a:solidFill>
@@ -12639,7 +11597,7 @@
 </p:sld>
 </file>
 
-<file path=ppt/slides/slide31.xml><?xml version="1.0" encoding="utf-8"?>
+<file path=ppt/slides/slide33.xml><?xml version="1.0" encoding="utf-8"?>
 <p:sld xmlns:a="http://schemas.openxmlformats.org/drawingml/2006/main" xmlns:r="http://schemas.openxmlformats.org/officeDocument/2006/relationships" xmlns:p="http://schemas.openxmlformats.org/presentationml/2006/main">
   <p:cSld>
     <p:spTree>
@@ -13420,7 +12378,7 @@
 </p:sld>
 </file>
 
-<file path=ppt/slides/slide32.xml><?xml version="1.0" encoding="utf-8"?>
+<file path=ppt/slides/slide34.xml><?xml version="1.0" encoding="utf-8"?>
 <p:sld xmlns:a="http://schemas.openxmlformats.org/drawingml/2006/main" xmlns:r="http://schemas.openxmlformats.org/officeDocument/2006/relationships" xmlns:p="http://schemas.openxmlformats.org/presentationml/2006/main">
   <p:cSld>
     <p:spTree>
@@ -13936,7 +12894,7 @@
 </p:sld>
 </file>
 
-<file path=ppt/slides/slide33.xml><?xml version="1.0" encoding="utf-8"?>
+<file path=ppt/slides/slide35.xml><?xml version="1.0" encoding="utf-8"?>
 <p:sld xmlns:a="http://schemas.openxmlformats.org/drawingml/2006/main" xmlns:r="http://schemas.openxmlformats.org/officeDocument/2006/relationships" xmlns:p="http://schemas.openxmlformats.org/presentationml/2006/main">
   <p:cSld>
     <p:spTree>
@@ -14336,7 +13294,772 @@
 </p:sld>
 </file>
 
-<file path=ppt/slides/slide34.xml><?xml version="1.0" encoding="utf-8"?>
+<file path=ppt/slides/slide36.xml><?xml version="1.0" encoding="utf-8"?>
+<p:sld xmlns:a="http://schemas.openxmlformats.org/drawingml/2006/main" xmlns:r="http://schemas.openxmlformats.org/officeDocument/2006/relationships" xmlns:p="http://schemas.openxmlformats.org/presentationml/2006/main">
+  <p:cSld>
+    <p:spTree>
+      <p:nvGrpSpPr>
+        <p:cNvPr id="1" name=""/>
+        <p:cNvGrpSpPr/>
+        <p:nvPr/>
+      </p:nvGrpSpPr>
+      <p:grpSpPr>
+        <a:xfrm>
+          <a:off x="0" y="0"/>
+          <a:ext cx="0" cy="0"/>
+          <a:chOff x="0" y="0"/>
+          <a:chExt cx="0" cy="0"/>
+        </a:xfrm>
+      </p:grpSpPr>
+      <p:sp>
+        <p:nvSpPr>
+          <p:cNvPr id="2" name="Title 1"/>
+          <p:cNvSpPr>
+            <a:spLocks noGrp="1"/>
+          </p:cNvSpPr>
+          <p:nvPr>
+            <p:ph type="title"/>
+          </p:nvPr>
+        </p:nvSpPr>
+        <p:spPr>
+          <a:xfrm>
+            <a:off x="0" y="0"/>
+            <a:ext cx="9144000" cy="871538"/>
+          </a:xfrm>
+        </p:spPr>
+        <p:txBody>
+          <a:bodyPr/>
+          <a:lstStyle/>
+          <a:p>
+            <a:pPr lvl="0" indent="0" marL="0">
+              <a:buNone/>
+            </a:pPr>
+            <a:r>
+              <a:rPr/>
+              <a:t>Making things fit on a slide (RevealJS)</a:t>
+            </a:r>
+          </a:p>
+        </p:txBody>
+      </p:sp>
+      <p:sp>
+        <p:nvSpPr>
+          <p:cNvPr id="4" name="Text Placeholder 3"/>
+          <p:cNvSpPr>
+            <a:spLocks noGrp="1"/>
+          </p:cNvSpPr>
+          <p:nvPr>
+            <p:ph idx="2" sz="half" type="body"/>
+          </p:nvPr>
+        </p:nvSpPr>
+        <p:spPr/>
+        <p:txBody>
+          <a:bodyPr/>
+          <a:lstStyle/>
+          <a:p>
+            <a:pPr lvl="0" indent="0" marL="0">
+              <a:buNone/>
+            </a:pPr>
+            <a:r>
+              <a:rPr/>
+              <a:t>These work in </a:t>
+            </a:r>
+            <a:r>
+              <a:rPr b="1"/>
+              <a:t>any</a:t>
+            </a:r>
+            <a:r>
+              <a:rPr/>
+              <a:t> Quarto presentation — they only change the slides, never the Word or PDF.</a:t>
+            </a:r>
+          </a:p>
+        </p:txBody>
+      </p:sp>
+      <p:graphicFrame>
+        <p:nvGraphicFramePr>
+          <p:cNvPr id="6" name="Content Placeholder 5"/>
+          <p:cNvGraphicFramePr>
+            <a:graphicFrameLocks noGrp="1"/>
+          </p:cNvGraphicFramePr>
+          <p:nvPr>
+            <p:ph idx="1"/>
+          </p:nvPr>
+        </p:nvGraphicFramePr>
+        <p:xfrm>
+          <a:off x="127000" y="2819400"/>
+          <a:ext cx="8750300" cy="1943100"/>
+        </p:xfrm>
+        <a:graphic>
+          <a:graphicData uri="http://schemas.openxmlformats.org/drawingml/2006/table">
+            <a:tbl>
+              <a:tblPr firstRow="1" bandRow="1">
+                <a:tableStyleId>{5C22544A-7EE6-4342-B048-85BDC9FD1C3A}</a:tableStyleId>
+              </a:tblPr>
+              <a:tblGrid>
+                <a:gridCol w="2628900"/>
+                <a:gridCol w="1930400"/>
+                <a:gridCol w="4203700"/>
+              </a:tblGrid>
+              <a:tr h="0">
+                <a:tc>
+                  <a:txBody>
+                    <a:bodyPr/>
+                    <a:lstStyle/>
+                    <a:p>
+                      <a:pPr lvl="0" indent="0" marL="0" algn="l">
+                        <a:buNone/>
+                      </a:pPr>
+                      <a:r>
+                        <a:rPr/>
+                        <a:t>Control</a:t>
+                      </a:r>
+                    </a:p>
+                  </a:txBody>
+                  <a:tcPr/>
+                </a:tc>
+                <a:tc>
+                  <a:txBody>
+                    <a:bodyPr/>
+                    <a:lstStyle/>
+                    <a:p>
+                      <a:pPr lvl="0" indent="0" marL="0" algn="l">
+                        <a:buNone/>
+                      </a:pPr>
+                      <a:r>
+                        <a:rPr/>
+                        <a:t>Where it goes</a:t>
+                      </a:r>
+                    </a:p>
+                  </a:txBody>
+                  <a:tcPr/>
+                </a:tc>
+                <a:tc>
+                  <a:txBody>
+                    <a:bodyPr/>
+                    <a:lstStyle/>
+                    <a:p>
+                      <a:pPr lvl="0" indent="0" marL="0" algn="l">
+                        <a:buNone/>
+                      </a:pPr>
+                      <a:r>
+                        <a:rPr/>
+                        <a:t>What it does</a:t>
+                      </a:r>
+                    </a:p>
+                  </a:txBody>
+                  <a:tcPr/>
+                </a:tc>
+              </a:tr>
+              <a:tr h="0">
+                <a:tc>
+                  <a:txBody>
+                    <a:bodyPr/>
+                    <a:lstStyle/>
+                    <a:p>
+                      <a:pPr lvl="0" indent="0" marL="0" algn="l">
+                        <a:buNone/>
+                      </a:pPr>
+                      <a:r>
+                        <a:rPr>
+                          <a:latin typeface="Courier"/>
+                        </a:rPr>
+                        <a:t>output-location: column</a:t>
+                      </a:r>
+                    </a:p>
+                  </a:txBody>
+                </a:tc>
+                <a:tc>
+                  <a:txBody>
+                    <a:bodyPr/>
+                    <a:lstStyle/>
+                    <a:p>
+                      <a:pPr lvl="0" indent="0" marL="0" algn="l">
+                        <a:buNone/>
+                      </a:pPr>
+                      <a:r>
+                        <a:rPr/>
+                        <a:t>chunk </a:t>
+                      </a:r>
+                      <a:r>
+                        <a:rPr>
+                          <a:latin typeface="Courier"/>
+                        </a:rPr>
+                        <a:t>#|</a:t>
+                      </a:r>
+                      <a:r>
+                        <a:rPr/>
+                        <a:t> line</a:t>
+                      </a:r>
+                    </a:p>
+                  </a:txBody>
+                </a:tc>
+                <a:tc>
+                  <a:txBody>
+                    <a:bodyPr/>
+                    <a:lstStyle/>
+                    <a:p>
+                      <a:pPr lvl="0" indent="0" marL="0" algn="l">
+                        <a:buNone/>
+                      </a:pPr>
+                      <a:r>
+                        <a:rPr/>
+                        <a:t>code on the left, result on the right</a:t>
+                      </a:r>
+                    </a:p>
+                  </a:txBody>
+                </a:tc>
+              </a:tr>
+              <a:tr h="0">
+                <a:tc>
+                  <a:txBody>
+                    <a:bodyPr/>
+                    <a:lstStyle/>
+                    <a:p>
+                      <a:pPr lvl="0" indent="0" marL="0" algn="l">
+                        <a:buNone/>
+                      </a:pPr>
+                      <a:r>
+                        <a:rPr>
+                          <a:latin typeface="Courier"/>
+                        </a:rPr>
+                        <a:t>output-location: slide</a:t>
+                      </a:r>
+                    </a:p>
+                  </a:txBody>
+                </a:tc>
+                <a:tc>
+                  <a:txBody>
+                    <a:bodyPr/>
+                    <a:lstStyle/>
+                    <a:p>
+                      <a:pPr lvl="0" indent="0" marL="0" algn="l">
+                        <a:buNone/>
+                      </a:pPr>
+                      <a:r>
+                        <a:rPr/>
+                        <a:t>chunk </a:t>
+                      </a:r>
+                      <a:r>
+                        <a:rPr>
+                          <a:latin typeface="Courier"/>
+                        </a:rPr>
+                        <a:t>#|</a:t>
+                      </a:r>
+                      <a:r>
+                        <a:rPr/>
+                        <a:t> line</a:t>
+                      </a:r>
+                    </a:p>
+                  </a:txBody>
+                </a:tc>
+                <a:tc>
+                  <a:txBody>
+                    <a:bodyPr/>
+                    <a:lstStyle/>
+                    <a:p>
+                      <a:pPr lvl="0" indent="0" marL="0" algn="l">
+                        <a:buNone/>
+                      </a:pPr>
+                      <a:r>
+                        <a:rPr/>
+                        <a:t>result gets its own slide after the code</a:t>
+                      </a:r>
+                    </a:p>
+                  </a:txBody>
+                </a:tc>
+              </a:tr>
+              <a:tr h="0">
+                <a:tc>
+                  <a:txBody>
+                    <a:bodyPr/>
+                    <a:lstStyle/>
+                    <a:p>
+                      <a:pPr lvl="0" indent="0" marL="0" algn="l">
+                        <a:buNone/>
+                      </a:pPr>
+                      <a:r>
+                        <a:rPr>
+                          <a:latin typeface="Courier"/>
+                        </a:rPr>
+                        <a:t>output-location: fragment</a:t>
+                      </a:r>
+                    </a:p>
+                  </a:txBody>
+                </a:tc>
+                <a:tc>
+                  <a:txBody>
+                    <a:bodyPr/>
+                    <a:lstStyle/>
+                    <a:p>
+                      <a:pPr lvl="0" indent="0" marL="0" algn="l">
+                        <a:buNone/>
+                      </a:pPr>
+                      <a:r>
+                        <a:rPr/>
+                        <a:t>chunk </a:t>
+                      </a:r>
+                      <a:r>
+                        <a:rPr>
+                          <a:latin typeface="Courier"/>
+                        </a:rPr>
+                        <a:t>#|</a:t>
+                      </a:r>
+                      <a:r>
+                        <a:rPr/>
+                        <a:t> line</a:t>
+                      </a:r>
+                    </a:p>
+                  </a:txBody>
+                </a:tc>
+                <a:tc>
+                  <a:txBody>
+                    <a:bodyPr/>
+                    <a:lstStyle/>
+                    <a:p>
+                      <a:pPr lvl="0" indent="0" marL="0" algn="l">
+                        <a:buNone/>
+                      </a:pPr>
+                      <a:r>
+                        <a:rPr/>
+                        <a:t>result appears on the next click</a:t>
+                      </a:r>
+                    </a:p>
+                  </a:txBody>
+                </a:tc>
+              </a:tr>
+              <a:tr h="0">
+                <a:tc>
+                  <a:txBody>
+                    <a:bodyPr/>
+                    <a:lstStyle/>
+                    <a:p>
+                      <a:pPr lvl="0" indent="0" marL="0" algn="l">
+                        <a:buNone/>
+                      </a:pPr>
+                      <a:r>
+                        <a:rPr>
+                          <a:latin typeface="Courier"/>
+                        </a:rPr>
+                        <a:t>fig-width</a:t>
+                      </a:r>
+                      <a:r>
+                        <a:rPr/>
+                        <a:t> / </a:t>
+                      </a:r>
+                      <a:r>
+                        <a:rPr>
+                          <a:latin typeface="Courier"/>
+                        </a:rPr>
+                        <a:t>fig-height</a:t>
+                      </a:r>
+                    </a:p>
+                  </a:txBody>
+                </a:tc>
+                <a:tc>
+                  <a:txBody>
+                    <a:bodyPr/>
+                    <a:lstStyle/>
+                    <a:p>
+                      <a:pPr lvl="0" indent="0" marL="0" algn="l">
+                        <a:buNone/>
+                      </a:pPr>
+                      <a:r>
+                        <a:rPr/>
+                        <a:t>chunk </a:t>
+                      </a:r>
+                      <a:r>
+                        <a:rPr>
+                          <a:latin typeface="Courier"/>
+                        </a:rPr>
+                        <a:t>#|</a:t>
+                      </a:r>
+                      <a:r>
+                        <a:rPr/>
+                        <a:t> line</a:t>
+                      </a:r>
+                    </a:p>
+                  </a:txBody>
+                </a:tc>
+                <a:tc>
+                  <a:txBody>
+                    <a:bodyPr/>
+                    <a:lstStyle/>
+                    <a:p>
+                      <a:pPr lvl="0" indent="0" marL="0" algn="l">
+                        <a:buNone/>
+                      </a:pPr>
+                      <a:r>
+                        <a:rPr/>
+                        <a:t>a shorter figure fits under more text</a:t>
+                      </a:r>
+                    </a:p>
+                  </a:txBody>
+                </a:tc>
+              </a:tr>
+              <a:tr h="0">
+                <a:tc>
+                  <a:txBody>
+                    <a:bodyPr/>
+                    <a:lstStyle/>
+                    <a:p>
+                      <a:pPr lvl="0" indent="0" marL="0" algn="l">
+                        <a:buNone/>
+                      </a:pPr>
+                      <a:r>
+                        <a:rPr>
+                          <a:latin typeface="Courier"/>
+                        </a:rPr>
+                        <a:t>echo: false</a:t>
+                      </a:r>
+                    </a:p>
+                  </a:txBody>
+                </a:tc>
+                <a:tc>
+                  <a:txBody>
+                    <a:bodyPr/>
+                    <a:lstStyle/>
+                    <a:p>
+                      <a:pPr lvl="0" indent="0" marL="0" algn="l">
+                        <a:buNone/>
+                      </a:pPr>
+                      <a:r>
+                        <a:rPr/>
+                        <a:t>chunk or </a:t>
+                      </a:r>
+                      <a:r>
+                        <a:rPr>
+                          <a:latin typeface="Courier"/>
+                        </a:rPr>
+                        <a:t>execute:</a:t>
+                      </a:r>
+                    </a:p>
+                  </a:txBody>
+                </a:tc>
+                <a:tc>
+                  <a:txBody>
+                    <a:bodyPr/>
+                    <a:lstStyle/>
+                    <a:p>
+                      <a:pPr lvl="0" indent="0" marL="0" algn="l">
+                        <a:buNone/>
+                      </a:pPr>
+                      <a:r>
+                        <a:rPr/>
+                        <a:t>hide the code — just show the result</a:t>
+                      </a:r>
+                    </a:p>
+                  </a:txBody>
+                </a:tc>
+              </a:tr>
+              <a:tr h="0">
+                <a:tc>
+                  <a:txBody>
+                    <a:bodyPr/>
+                    <a:lstStyle/>
+                    <a:p>
+                      <a:pPr lvl="0" indent="0" marL="0" algn="l">
+                        <a:buNone/>
+                      </a:pPr>
+                      <a:r>
+                        <a:rPr>
+                          <a:latin typeface="Courier"/>
+                        </a:rPr>
+                        <a:t>smaller: true</a:t>
+                      </a:r>
+                    </a:p>
+                  </a:txBody>
+                </a:tc>
+                <a:tc>
+                  <a:txBody>
+                    <a:bodyPr/>
+                    <a:lstStyle/>
+                    <a:p>
+                      <a:pPr lvl="0" indent="0" marL="0" algn="l">
+                        <a:buNone/>
+                      </a:pPr>
+                      <a:r>
+                        <a:rPr/>
+                        <a:t>under </a:t>
+                      </a:r>
+                      <a:r>
+                        <a:rPr>
+                          <a:latin typeface="Courier"/>
+                        </a:rPr>
+                        <a:t>revealjs:</a:t>
+                      </a:r>
+                    </a:p>
+                  </a:txBody>
+                </a:tc>
+                <a:tc>
+                  <a:txBody>
+                    <a:bodyPr/>
+                    <a:lstStyle/>
+                    <a:p>
+                      <a:pPr lvl="0" indent="0" marL="0" algn="l">
+                        <a:buNone/>
+                      </a:pPr>
+                      <a:r>
+                        <a:rPr/>
+                        <a:t>smaller text on every slide</a:t>
+                      </a:r>
+                    </a:p>
+                  </a:txBody>
+                </a:tc>
+              </a:tr>
+              <a:tr h="0">
+                <a:tc>
+                  <a:txBody>
+                    <a:bodyPr/>
+                    <a:lstStyle/>
+                    <a:p>
+                      <a:pPr lvl="0" indent="0" marL="0" algn="l">
+                        <a:buNone/>
+                      </a:pPr>
+                      <a:r>
+                        <a:rPr>
+                          <a:latin typeface="Courier"/>
+                        </a:rPr>
+                        <a:t>scrollable: true</a:t>
+                      </a:r>
+                    </a:p>
+                  </a:txBody>
+                </a:tc>
+                <a:tc>
+                  <a:txBody>
+                    <a:bodyPr/>
+                    <a:lstStyle/>
+                    <a:p>
+                      <a:pPr lvl="0" indent="0" marL="0" algn="l">
+                        <a:buNone/>
+                      </a:pPr>
+                      <a:r>
+                        <a:rPr/>
+                        <a:t>under </a:t>
+                      </a:r>
+                      <a:r>
+                        <a:rPr>
+                          <a:latin typeface="Courier"/>
+                        </a:rPr>
+                        <a:t>revealjs:</a:t>
+                      </a:r>
+                    </a:p>
+                  </a:txBody>
+                </a:tc>
+                <a:tc>
+                  <a:txBody>
+                    <a:bodyPr/>
+                    <a:lstStyle/>
+                    <a:p>
+                      <a:pPr lvl="0" indent="0" marL="0" algn="l">
+                        <a:buNone/>
+                      </a:pPr>
+                      <a:r>
+                        <a:rPr/>
+                        <a:t>a long slide scrolls instead of being cut off</a:t>
+                      </a:r>
+                    </a:p>
+                  </a:txBody>
+                </a:tc>
+              </a:tr>
+              <a:tr h="0">
+                <a:tc>
+                  <a:txBody>
+                    <a:bodyPr/>
+                    <a:lstStyle/>
+                    <a:p>
+                      <a:pPr lvl="0" indent="0" marL="0" algn="l">
+                        <a:buNone/>
+                      </a:pPr>
+                      <a:r>
+                        <a:rPr>
+                          <a:latin typeface="Courier"/>
+                        </a:rPr>
+                        <a:t>## Title {.smaller}</a:t>
+                      </a:r>
+                    </a:p>
+                  </a:txBody>
+                </a:tc>
+                <a:tc>
+                  <a:txBody>
+                    <a:bodyPr/>
+                    <a:lstStyle/>
+                    <a:p>
+                      <a:pPr lvl="0" indent="0" marL="0" algn="l">
+                        <a:buNone/>
+                      </a:pPr>
+                      <a:r>
+                        <a:rPr/>
+                        <a:t>on one heading</a:t>
+                      </a:r>
+                    </a:p>
+                  </a:txBody>
+                </a:tc>
+                <a:tc>
+                  <a:txBody>
+                    <a:bodyPr/>
+                    <a:lstStyle/>
+                    <a:p>
+                      <a:pPr lvl="0" indent="0" marL="0" algn="l">
+                        <a:buNone/>
+                      </a:pPr>
+                      <a:r>
+                        <a:rPr/>
+                        <a:t>smaller text on </a:t>
+                      </a:r>
+                      <a:r>
+                        <a:rPr b="1"/>
+                        <a:t>that</a:t>
+                      </a:r>
+                      <a:r>
+                        <a:rPr/>
+                        <a:t> slide only</a:t>
+                      </a:r>
+                    </a:p>
+                  </a:txBody>
+                </a:tc>
+              </a:tr>
+              <a:tr h="0">
+                <a:tc>
+                  <a:txBody>
+                    <a:bodyPr/>
+                    <a:lstStyle/>
+                    <a:p>
+                      <a:pPr lvl="0" indent="0" marL="0" algn="l">
+                        <a:buNone/>
+                      </a:pPr>
+                      <a:r>
+                        <a:rPr>
+                          <a:latin typeface="Courier"/>
+                        </a:rPr>
+                        <a:t>:::: columns</a:t>
+                      </a:r>
+                    </a:p>
+                  </a:txBody>
+                </a:tc>
+                <a:tc>
+                  <a:txBody>
+                    <a:bodyPr/>
+                    <a:lstStyle/>
+                    <a:p>
+                      <a:pPr lvl="0" indent="0" marL="0" algn="l">
+                        <a:buNone/>
+                      </a:pPr>
+                      <a:r>
+                        <a:rPr/>
+                        <a:t>in the Markdown</a:t>
+                      </a:r>
+                    </a:p>
+                  </a:txBody>
+                </a:tc>
+                <a:tc>
+                  <a:txBody>
+                    <a:bodyPr/>
+                    <a:lstStyle/>
+                    <a:p>
+                      <a:pPr lvl="0" indent="0" marL="0" algn="l">
+                        <a:buNone/>
+                      </a:pPr>
+                      <a:r>
+                        <a:rPr/>
+                        <a:t>put any two things side by side</a:t>
+                      </a:r>
+                    </a:p>
+                  </a:txBody>
+                </a:tc>
+              </a:tr>
+            </a:tbl>
+          </a:graphicData>
+        </a:graphic>
+      </p:graphicFrame>
+    </p:spTree>
+  </p:cSld>
+</p:sld>
+</file>
+
+<file path=ppt/slides/slide37.xml><?xml version="1.0" encoding="utf-8"?>
+<p:sld xmlns:a="http://schemas.openxmlformats.org/drawingml/2006/main" xmlns:r="http://schemas.openxmlformats.org/officeDocument/2006/relationships" xmlns:p="http://schemas.openxmlformats.org/presentationml/2006/main">
+  <p:cSld>
+    <p:spTree>
+      <p:nvGrpSpPr>
+        <p:cNvPr id="1" name=""/>
+        <p:cNvGrpSpPr/>
+        <p:nvPr/>
+      </p:nvGrpSpPr>
+      <p:grpSpPr>
+        <a:xfrm>
+          <a:off x="0" y="0"/>
+          <a:ext cx="0" cy="0"/>
+          <a:chOff x="0" y="0"/>
+          <a:chExt cx="0" cy="0"/>
+        </a:xfrm>
+      </p:grpSpPr>
+      <p:sp>
+        <p:nvSpPr>
+          <p:cNvPr id="3" name="Content Placeholder 2"/>
+          <p:cNvSpPr>
+            <a:spLocks noGrp="1"/>
+          </p:cNvSpPr>
+          <p:nvPr>
+            <p:ph idx="1"/>
+          </p:nvPr>
+        </p:nvSpPr>
+        <p:spPr/>
+        <p:txBody>
+          <a:bodyPr/>
+          <a:lstStyle/>
+          <a:p>
+            <a:pPr lvl="0" indent="0" marL="1270000">
+              <a:buNone/>
+            </a:pPr>
+            <a:r>
+              <a:rPr sz="2000" b="1"/>
+              <a:t>Tip</a:t>
+            </a:r>
+          </a:p>
+          <a:p>
+            <a:pPr lvl="0" indent="0" marL="1270000">
+              <a:buNone/>
+            </a:pPr>
+            <a:r>
+              <a:rPr sz="2000"/>
+              <a:t>Put </a:t>
+            </a:r>
+            <a:r>
+              <a:rPr sz="2000">
+                <a:latin typeface="Courier"/>
+              </a:rPr>
+              <a:t>output-location: column</a:t>
+            </a:r>
+            <a:r>
+              <a:rPr sz="2000"/>
+              <a:t> under </a:t>
+            </a:r>
+            <a:r>
+              <a:rPr sz="2000">
+                <a:latin typeface="Courier"/>
+              </a:rPr>
+              <a:t>revealjs:</a:t>
+            </a:r>
+            <a:r>
+              <a:rPr sz="2000"/>
+              <a:t> in the YAML and </a:t>
+            </a:r>
+            <a:r>
+              <a:rPr sz="2000" b="1"/>
+              <a:t>every</a:t>
+            </a:r>
+            <a:r>
+              <a:rPr sz="2000"/>
+              <a:t> chunk in your slides gets code-left, plot-right.</a:t>
+            </a:r>
+          </a:p>
+        </p:txBody>
+      </p:sp>
+    </p:spTree>
+  </p:cSld>
+</p:sld>
+</file>
+
+<file path=ppt/slides/slide38.xml><?xml version="1.0" encoding="utf-8"?>
 <p:sld xmlns:a="http://schemas.openxmlformats.org/drawingml/2006/main" xmlns:r="http://schemas.openxmlformats.org/officeDocument/2006/relationships" xmlns:p="http://schemas.openxmlformats.org/presentationml/2006/main">
   <p:cSld>
     <p:spTree>
@@ -14480,7 +14203,7 @@
 </p:sld>
 </file>
 
-<file path=ppt/slides/slide35.xml><?xml version="1.0" encoding="utf-8"?>
+<file path=ppt/slides/slide39.xml><?xml version="1.0" encoding="utf-8"?>
 <p:sld xmlns:a="http://schemas.openxmlformats.org/drawingml/2006/main" xmlns:r="http://schemas.openxmlformats.org/officeDocument/2006/relationships" xmlns:p="http://schemas.openxmlformats.org/presentationml/2006/main">
   <p:cSld>
     <p:spTree>

--- a/docs/content/quarto/quarto_lecture.pptx
+++ b/docs/content/quarto/quarto_lecture.pptx
@@ -3378,7 +3378,7 @@
             </a:pPr>
             <a:r>
               <a:rPr/>
-              <a:t>2026-09-23</a:t>
+              <a:t>2026-09-24</a:t>
             </a:r>
           </a:p>
         </p:txBody>

--- a/docs/content/quarto/quarto_lecture.pptx
+++ b/docs/content/quarto/quarto_lecture.pptx
@@ -3378,7 +3378,7 @@
             </a:pPr>
             <a:r>
               <a:rPr/>
-              <a:t>2026-09-24</a:t>
+              <a:t>2026-09-29</a:t>
             </a:r>
           </a:p>
         </p:txBody>

--- a/docs/content/quarto/quarto_lecture.pptx
+++ b/docs/content/quarto/quarto_lecture.pptx
@@ -3378,7 +3378,7 @@
             </a:pPr>
             <a:r>
               <a:rPr/>
-              <a:t>2026-09-29</a:t>
+              <a:t>2026-10-01</a:t>
             </a:r>
           </a:p>
         </p:txBody>

--- a/docs/content/quarto/quarto_lecture.pptx
+++ b/docs/content/quarto/quarto_lecture.pptx
@@ -3378,7 +3378,7 @@
             </a:pPr>
             <a:r>
               <a:rPr/>
-              <a:t>2026-10-01</a:t>
+              <a:t>2026-10-05</a:t>
             </a:r>
           </a:p>
         </p:txBody>
@@ -14300,7 +14300,7 @@
             </a:r>
             <a:r>
               <a:rPr b="1"/>
-              <a:t>top of the project</a:t>
+              <a:t>project top</a:t>
             </a:r>
             <a:r>
               <a:rPr/>
@@ -14435,7 +14435,7 @@
             </a:pPr>
             <a:r>
               <a:rPr sz="2000"/>
-              <a:t>From here on, every analysis can be a document that rebuilds itself from the raw data.</a:t>
+              <a:t>Every analysis can now be a document that rebuilds itself from the raw data.</a:t>
             </a:r>
           </a:p>
           <a:p>
@@ -14468,7 +14468,7 @@
             </a:pPr>
             <a:r>
               <a:rPr sz="2000"/>
-              <a:t>It is your template for every analysis this term: copy it, change the data file and column names, rewrite the text, Render.</a:t>
+              <a:t>Your template for every analysis this term: copy it, change the data file and column names, rewrite the text, Render.</a:t>
             </a:r>
           </a:p>
           <a:p>
@@ -14499,7 +14499,7 @@
             <a:pPr lvl="0"/>
             <a:r>
               <a:rPr/>
-              <a:t>Checking the assumptions first — normality (Shapiro–Wilk) and equal variances (Levene’s)</a:t>
+              <a:t>Checking assumptions first — normality and equal variance</a:t>
             </a:r>
           </a:p>
           <a:p>

--- a/docs/content/quarto/quarto_lecture.pptx
+++ b/docs/content/quarto/quarto_lecture.pptx
@@ -3378,7 +3378,7 @@
             </a:pPr>
             <a:r>
               <a:rPr/>
-              <a:t>2026-10-05</a:t>
+              <a:t>2026-10-08</a:t>
             </a:r>
           </a:p>
         </p:txBody>

--- a/docs/content/quarto/quarto_lecture.pptx
+++ b/docs/content/quarto/quarto_lecture.pptx
@@ -3378,7 +3378,7 @@
             </a:pPr>
             <a:r>
               <a:rPr/>
-              <a:t>2026-10-08</a:t>
+              <a:t>2026-10-09</a:t>
             </a:r>
           </a:p>
         </p:txBody>

--- a/docs/content/quarto/quarto_lecture.pptx
+++ b/docs/content/quarto/quarto_lecture.pptx
@@ -3378,7 +3378,7 @@
             </a:pPr>
             <a:r>
               <a:rPr/>
-              <a:t>2026-10-09</a:t>
+              <a:t>2026-10-19</a:t>
             </a:r>
           </a:p>
         </p:txBody>

--- a/docs/content/quarto/quarto_lecture.pptx
+++ b/docs/content/quarto/quarto_lecture.pptx
@@ -3378,7 +3378,7 @@
             </a:pPr>
             <a:r>
               <a:rPr/>
-              <a:t>2026-10-19</a:t>
+              <a:t>2026-10-22</a:t>
             </a:r>
           </a:p>
         </p:txBody>
